--- a/assets/presentations/diaporamas/A5-les-sept-objections.pptx
+++ b/assets/presentations/diaporamas/A5-les-sept-objections.pptx
@@ -15,6 +15,10 @@
     <p:sldId id="263" r:id="rId15"/>
     <p:sldId id="264" r:id="rId16"/>
     <p:sldId id="265" r:id="rId17"/>
+    <p:sldId id="266" r:id="rId18"/>
+    <p:sldId id="267" r:id="rId19"/>
+    <p:sldId id="268" r:id="rId20"/>
+    <p:sldId id="269" r:id="rId21"/>
   </p:sldIdLst>
   <p:sldSz cx="12191695" cy="6858000" type="screen4x3"/>
   <p:notesSz cx="6858000" cy="9144000"/>
@@ -581,6 +585,304 @@
           <a:lstStyle/>
           <a:p>
             <a:r>
+              <a:t>Réponse complète, telle qu'elle est dans la trousse :</a:t>
+            </a:r>
+          </a:p>
+          <a:p/>
+          <a:p>
+            <a:r>
+              <a:t>Non, et le matériel le prouve mieux qu'un discours : 1 264 diaporamas de séance avec 12 524 notes de présentateur, c'est-à-dire 1 518 heures de classe à donner. L'outil prépare, il ne fait pas le cours.</a:t>
+            </a:r>
+          </a:p>
+        </p:txBody>
+      </p:sp>
+      <p:sp>
+        <p:nvSpPr>
+          <p:cNvPr id="4" name="Slide Number Placeholder 3"/>
+          <p:cNvSpPr>
+            <a:spLocks noGrp="1"/>
+          </p:cNvSpPr>
+          <p:nvPr>
+            <p:ph type="sldNum" idx="5" sz="quarter"/>
+          </p:nvPr>
+        </p:nvSpPr>
+        <p:spPr/>
+      </p:sp>
+    </p:spTree>
+  </p:cSld>
+  <p:clrMapOvr>
+    <a:masterClrMapping/>
+  </p:clrMapOvr>
+</p:notes>
+</file>
+
+<file path=ppt/notesSlides/notesSlide11.xml><?xml version="1.0" encoding="utf-8"?>
+<p:notes xmlns:a="http://schemas.openxmlformats.org/drawingml/2006/main" xmlns:p="http://schemas.openxmlformats.org/presentationml/2006/main" xmlns:r="http://schemas.openxmlformats.org/officeDocument/2006/relationships">
+  <p:cSld>
+    <p:spTree>
+      <p:nvGrpSpPr>
+        <p:cNvPr id="1" name=""/>
+        <p:cNvGrpSpPr/>
+        <p:nvPr/>
+      </p:nvGrpSpPr>
+      <p:grpSpPr>
+        <a:xfrm>
+          <a:off x="0" y="0"/>
+          <a:ext cx="0" cy="0"/>
+          <a:chOff x="0" y="0"/>
+          <a:chExt cx="0" cy="0"/>
+        </a:xfrm>
+      </p:grpSpPr>
+      <p:sp>
+        <p:nvSpPr>
+          <p:cNvPr id="2" name="Slide Image Placeholder 1"/>
+          <p:cNvSpPr>
+            <a:spLocks noGrp="1"/>
+          </p:cNvSpPr>
+          <p:nvPr>
+            <p:ph type="sldImg" idx="2"/>
+          </p:nvPr>
+        </p:nvSpPr>
+        <p:spPr/>
+      </p:sp>
+      <p:sp>
+        <p:nvSpPr>
+          <p:cNvPr id="3" name="Notes Placeholder 2"/>
+          <p:cNvSpPr>
+            <a:spLocks noGrp="1"/>
+          </p:cNvSpPr>
+          <p:nvPr>
+            <p:ph type="body" idx="3" sz="quarter"/>
+          </p:nvPr>
+        </p:nvSpPr>
+        <p:spPr/>
+        <p:txBody>
+          <a:bodyPr/>
+          <a:lstStyle/>
+          <a:p>
+            <a:r>
+              <a:t>Réponse complète, telle qu'elle est dans la trousse :</a:t>
+            </a:r>
+          </a:p>
+          <a:p/>
+          <a:p>
+            <a:r>
+              <a:t>Nous. Chaque module part du programme d'études, avec sa situation de vie, ses intentions de communication et ses savoirs — rien n'est recopié d'un manuel. C'est ce qui permet d'y toucher : un module qui ne convient pas se réécrit.</a:t>
+            </a:r>
+          </a:p>
+        </p:txBody>
+      </p:sp>
+      <p:sp>
+        <p:nvSpPr>
+          <p:cNvPr id="4" name="Slide Number Placeholder 3"/>
+          <p:cNvSpPr>
+            <a:spLocks noGrp="1"/>
+          </p:cNvSpPr>
+          <p:nvPr>
+            <p:ph type="sldNum" idx="5" sz="quarter"/>
+          </p:nvPr>
+        </p:nvSpPr>
+        <p:spPr/>
+      </p:sp>
+    </p:spTree>
+  </p:cSld>
+  <p:clrMapOvr>
+    <a:masterClrMapping/>
+  </p:clrMapOvr>
+</p:notes>
+</file>
+
+<file path=ppt/notesSlides/notesSlide12.xml><?xml version="1.0" encoding="utf-8"?>
+<p:notes xmlns:a="http://schemas.openxmlformats.org/drawingml/2006/main" xmlns:p="http://schemas.openxmlformats.org/presentationml/2006/main" xmlns:r="http://schemas.openxmlformats.org/officeDocument/2006/relationships">
+  <p:cSld>
+    <p:spTree>
+      <p:nvGrpSpPr>
+        <p:cNvPr id="1" name=""/>
+        <p:cNvGrpSpPr/>
+        <p:nvPr/>
+      </p:nvGrpSpPr>
+      <p:grpSpPr>
+        <a:xfrm>
+          <a:off x="0" y="0"/>
+          <a:ext cx="0" cy="0"/>
+          <a:chOff x="0" y="0"/>
+          <a:chExt cx="0" cy="0"/>
+        </a:xfrm>
+      </p:grpSpPr>
+      <p:sp>
+        <p:nvSpPr>
+          <p:cNvPr id="2" name="Slide Image Placeholder 1"/>
+          <p:cNvSpPr>
+            <a:spLocks noGrp="1"/>
+          </p:cNvSpPr>
+          <p:nvPr>
+            <p:ph type="sldImg" idx="2"/>
+          </p:nvPr>
+        </p:nvSpPr>
+        <p:spPr/>
+      </p:sp>
+      <p:sp>
+        <p:nvSpPr>
+          <p:cNvPr id="3" name="Notes Placeholder 2"/>
+          <p:cNvSpPr>
+            <a:spLocks noGrp="1"/>
+          </p:cNvSpPr>
+          <p:nvPr>
+            <p:ph type="body" idx="3" sz="quarter"/>
+          </p:nvPr>
+        </p:nvSpPr>
+        <p:spPr/>
+        <p:txBody>
+          <a:bodyPr/>
+          <a:lstStyle/>
+          <a:p>
+            <a:r>
+              <a:t>Réponse complète, telle qu'elle est dans la trousse :</a:t>
+            </a:r>
+          </a:p>
+          <a:p/>
+          <a:p>
+            <a:r>
+              <a:t>Ils ont un téléphone, et c'est le cas d'usage principal, pas une adaptation : barre d'outils en bas de l'écran, banc de réponses sous le pouce, glisser-déposer au doigt. Aucune application à installer, aucun compte d'App Store.</a:t>
+            </a:r>
+          </a:p>
+        </p:txBody>
+      </p:sp>
+      <p:sp>
+        <p:nvSpPr>
+          <p:cNvPr id="4" name="Slide Number Placeholder 3"/>
+          <p:cNvSpPr>
+            <a:spLocks noGrp="1"/>
+          </p:cNvSpPr>
+          <p:nvPr>
+            <p:ph type="sldNum" idx="5" sz="quarter"/>
+          </p:nvPr>
+        </p:nvSpPr>
+        <p:spPr/>
+      </p:sp>
+    </p:spTree>
+  </p:cSld>
+  <p:clrMapOvr>
+    <a:masterClrMapping/>
+  </p:clrMapOvr>
+</p:notes>
+</file>
+
+<file path=ppt/notesSlides/notesSlide13.xml><?xml version="1.0" encoding="utf-8"?>
+<p:notes xmlns:a="http://schemas.openxmlformats.org/drawingml/2006/main" xmlns:p="http://schemas.openxmlformats.org/presentationml/2006/main" xmlns:r="http://schemas.openxmlformats.org/officeDocument/2006/relationships">
+  <p:cSld>
+    <p:spTree>
+      <p:nvGrpSpPr>
+        <p:cNvPr id="1" name=""/>
+        <p:cNvGrpSpPr/>
+        <p:nvPr/>
+      </p:nvGrpSpPr>
+      <p:grpSpPr>
+        <a:xfrm>
+          <a:off x="0" y="0"/>
+          <a:ext cx="0" cy="0"/>
+          <a:chOff x="0" y="0"/>
+          <a:chExt cx="0" cy="0"/>
+        </a:xfrm>
+      </p:grpSpPr>
+      <p:sp>
+        <p:nvSpPr>
+          <p:cNvPr id="2" name="Slide Image Placeholder 1"/>
+          <p:cNvSpPr>
+            <a:spLocks noGrp="1"/>
+          </p:cNvSpPr>
+          <p:nvPr>
+            <p:ph type="sldImg" idx="2"/>
+          </p:nvPr>
+        </p:nvSpPr>
+        <p:spPr/>
+      </p:sp>
+      <p:sp>
+        <p:nvSpPr>
+          <p:cNvPr id="3" name="Notes Placeholder 2"/>
+          <p:cNvSpPr>
+            <a:spLocks noGrp="1"/>
+          </p:cNvSpPr>
+          <p:nvPr>
+            <p:ph type="body" idx="3" sz="quarter"/>
+          </p:nvPr>
+        </p:nvSpPr>
+        <p:spPr/>
+        <p:txBody>
+          <a:bodyPr/>
+          <a:lstStyle/>
+          <a:p>
+            <a:r>
+              <a:t>À projeter juste après la réponse, sans commenter. Une objection tombe mieux devant un écran que devant une phrase.</a:t>
+            </a:r>
+          </a:p>
+        </p:txBody>
+      </p:sp>
+      <p:sp>
+        <p:nvSpPr>
+          <p:cNvPr id="4" name="Slide Number Placeholder 3"/>
+          <p:cNvSpPr>
+            <a:spLocks noGrp="1"/>
+          </p:cNvSpPr>
+          <p:nvPr>
+            <p:ph type="sldNum" idx="5" sz="quarter"/>
+          </p:nvPr>
+        </p:nvSpPr>
+        <p:spPr/>
+      </p:sp>
+    </p:spTree>
+  </p:cSld>
+  <p:clrMapOvr>
+    <a:masterClrMapping/>
+  </p:clrMapOvr>
+</p:notes>
+</file>
+
+<file path=ppt/notesSlides/notesSlide14.xml><?xml version="1.0" encoding="utf-8"?>
+<p:notes xmlns:a="http://schemas.openxmlformats.org/drawingml/2006/main" xmlns:p="http://schemas.openxmlformats.org/presentationml/2006/main" xmlns:r="http://schemas.openxmlformats.org/officeDocument/2006/relationships">
+  <p:cSld>
+    <p:spTree>
+      <p:nvGrpSpPr>
+        <p:cNvPr id="1" name=""/>
+        <p:cNvGrpSpPr/>
+        <p:nvPr/>
+      </p:nvGrpSpPr>
+      <p:grpSpPr>
+        <a:xfrm>
+          <a:off x="0" y="0"/>
+          <a:ext cx="0" cy="0"/>
+          <a:chOff x="0" y="0"/>
+          <a:chExt cx="0" cy="0"/>
+        </a:xfrm>
+      </p:grpSpPr>
+      <p:sp>
+        <p:nvSpPr>
+          <p:cNvPr id="2" name="Slide Image Placeholder 1"/>
+          <p:cNvSpPr>
+            <a:spLocks noGrp="1"/>
+          </p:cNvSpPr>
+          <p:nvPr>
+            <p:ph type="sldImg" idx="2"/>
+          </p:nvPr>
+        </p:nvSpPr>
+        <p:spPr/>
+      </p:sp>
+      <p:sp>
+        <p:nvSpPr>
+          <p:cNvPr id="3" name="Notes Placeholder 2"/>
+          <p:cNvSpPr>
+            <a:spLocks noGrp="1"/>
+          </p:cNvSpPr>
+          <p:nvPr>
+            <p:ph type="body" idx="3" sz="quarter"/>
+          </p:nvPr>
+        </p:nvSpPr>
+        <p:spPr/>
+        <p:txBody>
+          <a:bodyPr/>
+          <a:lstStyle/>
+          <a:p>
+            <a:r>
               <a:t>La vraie question de fin. Une salle silencieuse n'est pas une salle convaincue.</a:t>
             </a:r>
           </a:p>
@@ -797,13 +1099,7 @@
           <a:lstStyle/>
           <a:p>
             <a:r>
-              <a:t>Réponse complète, telle qu'elle est dans la trousse :</a:t>
-            </a:r>
-          </a:p>
-          <a:p/>
-          <a:p>
-            <a:r>
-              <a:t>Non, et il y a trois conditions — elles sont écrites dans le guide pour la direction. Dire aussi ce qui n'est jamais gardé : les corrections de l'assistant s'affichent et ne s'écrivent nulle part, et le registre des appels compte des jetons sans jamais garder un texte.</a:t>
+              <a:t>À projeter juste après la réponse, sans commenter. Une objection tombe mieux devant un écran que devant une phrase.</a:t>
             </a:r>
           </a:p>
         </p:txBody>
@@ -879,7 +1175,7 @@
           <a:p/>
           <a:p>
             <a:r>
-              <a:t>Pas nécessairement. Le mode séance ouvre une classe avec une feuille photocopiée et un code de six caractères : aucun compte, aucun pseudonyme, aucune donnée identifiante — et l'enseignant a quand même son tableau, participant par participant.</a:t>
+              <a:t>Non, et il y a trois conditions — elles sont écrites dans le guide pour la direction. Dire aussi ce qui n'est jamais gardé : les corrections de l'assistant s'affichent et ne s'écrivent nulle part, et le registre des appels compte des jetons sans jamais garder un texte.</a:t>
             </a:r>
           </a:p>
         </p:txBody>
@@ -949,13 +1245,7 @@
           <a:lstStyle/>
           <a:p>
             <a:r>
-              <a:t>Réponse complète, telle qu'elle est dans la trousse :</a:t>
-            </a:r>
-          </a:p>
-          <a:p/>
-          <a:p>
-            <a:r>
-              <a:t>Le coût réel par élève et par module est dans « Le prix d'un module », avec la part qui vient des appels aux modèles. Un centre qui ferme l'assistant ne paie plus rien à l'usage : les voix sont enregistrées d'avance et les exercices se corrigent sur l'appareil.</a:t>
+              <a:t>À projeter juste après la réponse, sans commenter. Une objection tombe mieux devant un écran que devant une phrase.</a:t>
             </a:r>
           </a:p>
         </p:txBody>
@@ -1031,7 +1321,7 @@
           <a:p/>
           <a:p>
             <a:r>
-              <a:t>Non, et le matériel le prouve mieux qu'un discours : 1 264 diaporamas de séance avec 12 524 notes de présentateur, c'est-à-dire 1 518 heures de classe à donner. L'outil prépare, il ne fait pas le cours.</a:t>
+              <a:t>Pas nécessairement. Le mode séance ouvre une classe avec une feuille photocopiée et un code de six caractères : aucun compte, aucun pseudonyme, aucune donnée identifiante — et l'enseignant a quand même son tableau, participant par participant.</a:t>
             </a:r>
           </a:p>
         </p:txBody>
@@ -1101,13 +1391,7 @@
           <a:lstStyle/>
           <a:p>
             <a:r>
-              <a:t>Réponse complète, telle qu'elle est dans la trousse :</a:t>
-            </a:r>
-          </a:p>
-          <a:p/>
-          <a:p>
-            <a:r>
-              <a:t>Nous. Chaque module part du programme d'études, avec sa situation de vie, ses intentions de communication et ses savoirs — rien n'est recopié d'un manuel. C'est ce qui permet d'y toucher : un module qui ne convient pas se réécrit.</a:t>
+              <a:t>À projeter juste après la réponse, sans commenter. Une objection tombe mieux devant un écran que devant une phrase.</a:t>
             </a:r>
           </a:p>
         </p:txBody>
@@ -1183,7 +1467,7 @@
           <a:p/>
           <a:p>
             <a:r>
-              <a:t>Ils ont un téléphone, et c'est le cas d'usage principal, pas une adaptation : barre d'outils en bas de l'écran, banc de réponses sous le pouce, glisser-déposer au doigt. Aucune application à installer, aucun compte d'App Store.</a:t>
+              <a:t>Le coût réel par élève et par module est dans « Le prix d'un module », avec la part qui vient des appels aux modèles. Un centre qui ferme l'assistant ne paie plus rien à l'usage : les voix sont enregistrées d'avance et les exercices se corrigent sur l'appareil.</a:t>
             </a:r>
           </a:p>
         </p:txBody>
@@ -4573,6 +4857,1978 @@
       </p:sp>
       <p:sp>
         <p:nvSpPr>
+          <p:cNvPr id="5" name="TextBox 4"/>
+          <p:cNvSpPr txBox="1"/>
+          <p:nvPr/>
+        </p:nvSpPr>
+        <p:spPr>
+          <a:xfrm>
+            <a:off x="566928" y="420624"/>
+            <a:ext cx="11057839" cy="237744"/>
+          </a:xfrm>
+          <a:prstGeom prst="rect">
+            <a:avLst/>
+          </a:prstGeom>
+          <a:noFill/>
+        </p:spPr>
+        <p:txBody>
+          <a:bodyPr wrap="square" lIns="0" rIns="0" tIns="0" bIns="0" anchor="t">
+            <a:spAutoFit/>
+          </a:bodyPr>
+          <a:lstStyle/>
+          <a:p>
+            <a:pPr algn="l">
+              <a:lnSpc>
+                <a:spcPct val="135000"/>
+              </a:lnSpc>
+            </a:pPr>
+            <a:r>
+              <a:rPr sz="1300" b="1" i="0" spc="156">
+                <a:solidFill>
+                  <a:srgbClr val="A5335F"/>
+                </a:solidFill>
+                <a:latin typeface="Verdana"/>
+              </a:rPr>
+              <a:t>CE QU'ON ENTEND</a:t>
+            </a:r>
+          </a:p>
+        </p:txBody>
+      </p:sp>
+      <p:sp>
+        <p:nvSpPr>
+          <p:cNvPr id="6" name="TextBox 5"/>
+          <p:cNvSpPr txBox="1"/>
+          <p:nvPr/>
+        </p:nvSpPr>
+        <p:spPr>
+          <a:xfrm>
+            <a:off x="566928" y="749808"/>
+            <a:ext cx="11057839" cy="877824"/>
+          </a:xfrm>
+          <a:prstGeom prst="rect">
+            <a:avLst/>
+          </a:prstGeom>
+          <a:noFill/>
+        </p:spPr>
+        <p:txBody>
+          <a:bodyPr wrap="square" lIns="0" rIns="0" tIns="0" bIns="0" anchor="t">
+            <a:spAutoFit/>
+          </a:bodyPr>
+          <a:lstStyle/>
+          <a:p>
+            <a:pPr algn="l">
+              <a:lnSpc>
+                <a:spcPct val="115000"/>
+              </a:lnSpc>
+            </a:pPr>
+            <a:r>
+              <a:rPr sz="3400" b="1" i="0">
+                <a:solidFill>
+                  <a:srgbClr val="17181A"/>
+                </a:solidFill>
+                <a:latin typeface="Verdana"/>
+              </a:rPr>
+              <a:t>Le piège le plus fréquent</a:t>
+            </a:r>
+          </a:p>
+        </p:txBody>
+      </p:sp>
+      <p:sp>
+        <p:nvSpPr>
+          <p:cNvPr id="7" name="Rounded Rectangle 6"/>
+          <p:cNvSpPr/>
+          <p:nvPr/>
+        </p:nvSpPr>
+        <p:spPr>
+          <a:xfrm>
+            <a:off x="566928" y="1856232"/>
+            <a:ext cx="5428335" cy="2331720"/>
+          </a:xfrm>
+          <a:prstGeom prst="roundRect">
+            <a:avLst>
+              <a:gd name="adj" fmla="val 6274"/>
+            </a:avLst>
+          </a:prstGeom>
+          <a:solidFill>
+            <a:srgbClr val="FFF6F5"/>
+          </a:solidFill>
+          <a:ln w="12700">
+            <a:solidFill>
+              <a:srgbClr val="DC2626"/>
+            </a:solidFill>
+          </a:ln>
+          <a:effectLst/>
+        </p:spPr>
+        <p:style>
+          <a:lnRef idx="1">
+            <a:schemeClr val="accent1"/>
+          </a:lnRef>
+          <a:fillRef idx="3">
+            <a:schemeClr val="accent1"/>
+          </a:fillRef>
+          <a:effectRef idx="2">
+            <a:schemeClr val="accent1"/>
+          </a:effectRef>
+          <a:fontRef idx="minor">
+            <a:schemeClr val="lt1"/>
+          </a:fontRef>
+        </p:style>
+        <p:txBody>
+          <a:bodyPr rtlCol="0" anchor="ctr"/>
+          <a:lstStyle/>
+          <a:p/>
+        </p:txBody>
+      </p:sp>
+      <p:sp>
+        <p:nvSpPr>
+          <p:cNvPr id="8" name="TextBox 7"/>
+          <p:cNvSpPr txBox="1"/>
+          <p:nvPr/>
+        </p:nvSpPr>
+        <p:spPr>
+          <a:xfrm>
+            <a:off x="932688" y="2130552"/>
+            <a:ext cx="4696815" cy="274320"/>
+          </a:xfrm>
+          <a:prstGeom prst="rect">
+            <a:avLst/>
+          </a:prstGeom>
+          <a:noFill/>
+        </p:spPr>
+        <p:txBody>
+          <a:bodyPr wrap="square" lIns="0" rIns="0" tIns="0" bIns="0" anchor="t">
+            <a:spAutoFit/>
+          </a:bodyPr>
+          <a:lstStyle/>
+          <a:p>
+            <a:pPr algn="l">
+              <a:lnSpc>
+                <a:spcPct val="135000"/>
+              </a:lnSpc>
+            </a:pPr>
+            <a:r>
+              <a:rPr sz="1300" b="1" i="0" spc="156">
+                <a:solidFill>
+                  <a:srgbClr val="B91C1C"/>
+                </a:solidFill>
+                <a:latin typeface="Verdana"/>
+              </a:rPr>
+              <a:t>ON ENTEND SOUVENT</a:t>
+            </a:r>
+          </a:p>
+        </p:txBody>
+      </p:sp>
+      <p:sp>
+        <p:nvSpPr>
+          <p:cNvPr id="9" name="TextBox 8"/>
+          <p:cNvSpPr txBox="1"/>
+          <p:nvPr/>
+        </p:nvSpPr>
+        <p:spPr>
+          <a:xfrm>
+            <a:off x="932688" y="2569464"/>
+            <a:ext cx="4696815" cy="1417320"/>
+          </a:xfrm>
+          <a:prstGeom prst="rect">
+            <a:avLst/>
+          </a:prstGeom>
+          <a:noFill/>
+        </p:spPr>
+        <p:txBody>
+          <a:bodyPr wrap="square" lIns="0" rIns="0" tIns="0" bIns="0" anchor="t">
+            <a:spAutoFit/>
+          </a:bodyPr>
+          <a:lstStyle/>
+          <a:p>
+            <a:pPr algn="l">
+              <a:lnSpc>
+                <a:spcPct val="130000"/>
+              </a:lnSpc>
+            </a:pPr>
+            <a:r>
+              <a:rPr sz="2500" b="1" i="0">
+                <a:solidFill>
+                  <a:srgbClr val="17181A"/>
+                </a:solidFill>
+                <a:latin typeface="Verdana"/>
+              </a:rPr>
+              <a:t>« Est-ce que ça remplace l'enseignant ? »</a:t>
+            </a:r>
+          </a:p>
+        </p:txBody>
+      </p:sp>
+      <p:sp>
+        <p:nvSpPr>
+          <p:cNvPr id="10" name="Rounded Rectangle 9"/>
+          <p:cNvSpPr/>
+          <p:nvPr/>
+        </p:nvSpPr>
+        <p:spPr>
+          <a:xfrm>
+            <a:off x="6196431" y="1856232"/>
+            <a:ext cx="5428335" cy="2331720"/>
+          </a:xfrm>
+          <a:prstGeom prst="roundRect">
+            <a:avLst>
+              <a:gd name="adj" fmla="val 6274"/>
+            </a:avLst>
+          </a:prstGeom>
+          <a:solidFill>
+            <a:srgbClr val="E6F5EE"/>
+          </a:solidFill>
+          <a:ln w="12700">
+            <a:solidFill>
+              <a:srgbClr val="0A8F5B"/>
+            </a:solidFill>
+          </a:ln>
+          <a:effectLst/>
+        </p:spPr>
+        <p:style>
+          <a:lnRef idx="1">
+            <a:schemeClr val="accent1"/>
+          </a:lnRef>
+          <a:fillRef idx="3">
+            <a:schemeClr val="accent1"/>
+          </a:fillRef>
+          <a:effectRef idx="2">
+            <a:schemeClr val="accent1"/>
+          </a:effectRef>
+          <a:fontRef idx="minor">
+            <a:schemeClr val="lt1"/>
+          </a:fontRef>
+        </p:style>
+        <p:txBody>
+          <a:bodyPr rtlCol="0" anchor="ctr"/>
+          <a:lstStyle/>
+          <a:p/>
+        </p:txBody>
+      </p:sp>
+      <p:sp>
+        <p:nvSpPr>
+          <p:cNvPr id="11" name="TextBox 10"/>
+          <p:cNvSpPr txBox="1"/>
+          <p:nvPr/>
+        </p:nvSpPr>
+        <p:spPr>
+          <a:xfrm>
+            <a:off x="6562191" y="2130552"/>
+            <a:ext cx="4696815" cy="274320"/>
+          </a:xfrm>
+          <a:prstGeom prst="rect">
+            <a:avLst/>
+          </a:prstGeom>
+          <a:noFill/>
+        </p:spPr>
+        <p:txBody>
+          <a:bodyPr wrap="square" lIns="0" rIns="0" tIns="0" bIns="0" anchor="t">
+            <a:spAutoFit/>
+          </a:bodyPr>
+          <a:lstStyle/>
+          <a:p>
+            <a:pPr algn="l">
+              <a:lnSpc>
+                <a:spcPct val="135000"/>
+              </a:lnSpc>
+            </a:pPr>
+            <a:r>
+              <a:rPr sz="1300" b="1" i="0" spc="156">
+                <a:solidFill>
+                  <a:srgbClr val="07734A"/>
+                </a:solidFill>
+                <a:latin typeface="Verdana"/>
+              </a:rPr>
+              <a:t>IL FAUT DIRE PLUTÔT</a:t>
+            </a:r>
+          </a:p>
+        </p:txBody>
+      </p:sp>
+      <p:sp>
+        <p:nvSpPr>
+          <p:cNvPr id="12" name="TextBox 11"/>
+          <p:cNvSpPr txBox="1"/>
+          <p:nvPr/>
+        </p:nvSpPr>
+        <p:spPr>
+          <a:xfrm>
+            <a:off x="6562191" y="2569464"/>
+            <a:ext cx="4696815" cy="1417320"/>
+          </a:xfrm>
+          <a:prstGeom prst="rect">
+            <a:avLst/>
+          </a:prstGeom>
+          <a:noFill/>
+        </p:spPr>
+        <p:txBody>
+          <a:bodyPr wrap="square" lIns="0" rIns="0" tIns="0" bIns="0" anchor="t">
+            <a:spAutoFit/>
+          </a:bodyPr>
+          <a:lstStyle/>
+          <a:p>
+            <a:pPr algn="l">
+              <a:lnSpc>
+                <a:spcPct val="130000"/>
+              </a:lnSpc>
+            </a:pPr>
+            <a:r>
+              <a:rPr sz="2500" b="1" i="0">
+                <a:solidFill>
+                  <a:srgbClr val="17181A"/>
+                </a:solidFill>
+                <a:latin typeface="Verdana"/>
+              </a:rPr>
+              <a:t>Il n'y a pas de cours sans lui.</a:t>
+            </a:r>
+          </a:p>
+        </p:txBody>
+      </p:sp>
+      <p:sp>
+        <p:nvSpPr>
+          <p:cNvPr id="13" name="Rounded Rectangle 12"/>
+          <p:cNvSpPr/>
+          <p:nvPr/>
+        </p:nvSpPr>
+        <p:spPr>
+          <a:xfrm>
+            <a:off x="566928" y="4462272"/>
+            <a:ext cx="11057839" cy="1285240"/>
+          </a:xfrm>
+          <a:prstGeom prst="roundRect">
+            <a:avLst>
+              <a:gd name="adj" fmla="val 11383"/>
+            </a:avLst>
+          </a:prstGeom>
+          <a:solidFill>
+            <a:srgbClr val="FFFFFF"/>
+          </a:solidFill>
+          <a:ln w="12700">
+            <a:solidFill>
+              <a:srgbClr val="EAEAE8"/>
+            </a:solidFill>
+          </a:ln>
+          <a:effectLst/>
+        </p:spPr>
+        <p:style>
+          <a:lnRef idx="1">
+            <a:schemeClr val="accent1"/>
+          </a:lnRef>
+          <a:fillRef idx="3">
+            <a:schemeClr val="accent1"/>
+          </a:fillRef>
+          <a:effectRef idx="2">
+            <a:schemeClr val="accent1"/>
+          </a:effectRef>
+          <a:fontRef idx="minor">
+            <a:schemeClr val="lt1"/>
+          </a:fontRef>
+        </p:style>
+        <p:txBody>
+          <a:bodyPr rtlCol="0" anchor="ctr"/>
+          <a:lstStyle/>
+          <a:p/>
+        </p:txBody>
+      </p:sp>
+      <p:sp>
+        <p:nvSpPr>
+          <p:cNvPr id="14" name="TextBox 13"/>
+          <p:cNvSpPr txBox="1"/>
+          <p:nvPr/>
+        </p:nvSpPr>
+        <p:spPr>
+          <a:xfrm>
+            <a:off x="969264" y="4736592"/>
+            <a:ext cx="10234879" cy="782320"/>
+          </a:xfrm>
+          <a:prstGeom prst="rect">
+            <a:avLst/>
+          </a:prstGeom>
+          <a:noFill/>
+        </p:spPr>
+        <p:txBody>
+          <a:bodyPr wrap="square" lIns="0" rIns="0" tIns="0" bIns="0" anchor="t">
+            <a:spAutoFit/>
+          </a:bodyPr>
+          <a:lstStyle/>
+          <a:p>
+            <a:pPr algn="l">
+              <a:lnSpc>
+                <a:spcPct val="145000"/>
+              </a:lnSpc>
+            </a:pPr>
+            <a:r>
+              <a:rPr sz="2000" b="0" i="0">
+                <a:solidFill>
+                  <a:srgbClr val="4B4F52"/>
+                </a:solidFill>
+                <a:latin typeface="Verdana"/>
+              </a:rPr>
+              <a:t>C'est l'enseignant qui ouvre un module, qui décide de la séance, qui lit les productions. Rien ne s'ouvre tout seul à un élève.</a:t>
+            </a:r>
+          </a:p>
+        </p:txBody>
+      </p:sp>
+    </p:spTree>
+  </p:cSld>
+  <p:clrMapOvr>
+    <a:masterClrMapping/>
+  </p:clrMapOvr>
+</p:sld>
+</file>
+
+<file path=ppt/slides/slide11.xml><?xml version="1.0" encoding="utf-8"?>
+<p:sld xmlns:a="http://schemas.openxmlformats.org/drawingml/2006/main" xmlns:p="http://schemas.openxmlformats.org/presentationml/2006/main" xmlns:r="http://schemas.openxmlformats.org/officeDocument/2006/relationships">
+  <p:cSld>
+    <p:spTree>
+      <p:nvGrpSpPr>
+        <p:cNvPr id="1" name=""/>
+        <p:cNvGrpSpPr/>
+        <p:nvPr/>
+      </p:nvGrpSpPr>
+      <p:grpSpPr/>
+      <p:sp>
+        <p:nvSpPr>
+          <p:cNvPr id="2" name="Rectangle 1"/>
+          <p:cNvSpPr/>
+          <p:nvPr/>
+        </p:nvSpPr>
+        <p:spPr>
+          <a:xfrm>
+            <a:off x="0" y="0"/>
+            <a:ext cx="12191695" cy="6858000"/>
+          </a:xfrm>
+          <a:prstGeom prst="rect">
+            <a:avLst/>
+          </a:prstGeom>
+          <a:solidFill>
+            <a:srgbClr val="F7F7F5"/>
+          </a:solidFill>
+          <a:ln>
+            <a:noFill/>
+          </a:ln>
+          <a:effectLst/>
+        </p:spPr>
+        <p:style>
+          <a:lnRef idx="1">
+            <a:schemeClr val="accent1"/>
+          </a:lnRef>
+          <a:fillRef idx="3">
+            <a:schemeClr val="accent1"/>
+          </a:fillRef>
+          <a:effectRef idx="2">
+            <a:schemeClr val="accent1"/>
+          </a:effectRef>
+          <a:fontRef idx="minor">
+            <a:schemeClr val="lt1"/>
+          </a:fontRef>
+        </p:style>
+        <p:txBody>
+          <a:bodyPr rtlCol="0" anchor="ctr"/>
+          <a:lstStyle/>
+          <a:p/>
+        </p:txBody>
+      </p:sp>
+      <p:sp>
+        <p:nvSpPr>
+          <p:cNvPr id="3" name="TextBox 2"/>
+          <p:cNvSpPr txBox="1"/>
+          <p:nvPr/>
+        </p:nvSpPr>
+        <p:spPr>
+          <a:xfrm>
+            <a:off x="566928" y="6355080"/>
+            <a:ext cx="6400800" cy="219456"/>
+          </a:xfrm>
+          <a:prstGeom prst="rect">
+            <a:avLst/>
+          </a:prstGeom>
+          <a:noFill/>
+        </p:spPr>
+        <p:txBody>
+          <a:bodyPr wrap="square" lIns="0" rIns="0" tIns="0" bIns="0" anchor="t">
+            <a:spAutoFit/>
+          </a:bodyPr>
+          <a:lstStyle/>
+          <a:p>
+            <a:pPr algn="l">
+              <a:lnSpc>
+                <a:spcPct val="135000"/>
+              </a:lnSpc>
+            </a:pPr>
+            <a:r>
+              <a:rPr sz="1200" b="0" i="0">
+                <a:solidFill>
+                  <a:srgbClr val="6E7175"/>
+                </a:solidFill>
+                <a:latin typeface="Verdana"/>
+              </a:rPr>
+              <a:t>A5 · francis · présentation</a:t>
+            </a:r>
+          </a:p>
+        </p:txBody>
+      </p:sp>
+      <p:sp>
+        <p:nvSpPr>
+          <p:cNvPr id="4" name="TextBox 3"/>
+          <p:cNvSpPr txBox="1"/>
+          <p:nvPr/>
+        </p:nvSpPr>
+        <p:spPr>
+          <a:xfrm>
+            <a:off x="10710367" y="6355080"/>
+            <a:ext cx="914400" cy="219456"/>
+          </a:xfrm>
+          <a:prstGeom prst="rect">
+            <a:avLst/>
+          </a:prstGeom>
+          <a:noFill/>
+        </p:spPr>
+        <p:txBody>
+          <a:bodyPr wrap="square" lIns="0" rIns="0" tIns="0" bIns="0" anchor="t">
+            <a:spAutoFit/>
+          </a:bodyPr>
+          <a:lstStyle/>
+          <a:p>
+            <a:pPr algn="r">
+              <a:lnSpc>
+                <a:spcPct val="135000"/>
+              </a:lnSpc>
+            </a:pPr>
+            <a:r>
+              <a:rPr sz="1200" b="0" i="0">
+                <a:solidFill>
+                  <a:srgbClr val="6E7175"/>
+                </a:solidFill>
+                <a:latin typeface="Verdana"/>
+              </a:rPr>
+              <a:t>11</a:t>
+            </a:r>
+          </a:p>
+        </p:txBody>
+      </p:sp>
+      <p:sp>
+        <p:nvSpPr>
+          <p:cNvPr id="5" name="TextBox 4"/>
+          <p:cNvSpPr txBox="1"/>
+          <p:nvPr/>
+        </p:nvSpPr>
+        <p:spPr>
+          <a:xfrm>
+            <a:off x="566928" y="420624"/>
+            <a:ext cx="11057839" cy="237744"/>
+          </a:xfrm>
+          <a:prstGeom prst="rect">
+            <a:avLst/>
+          </a:prstGeom>
+          <a:noFill/>
+        </p:spPr>
+        <p:txBody>
+          <a:bodyPr wrap="square" lIns="0" rIns="0" tIns="0" bIns="0" anchor="t">
+            <a:spAutoFit/>
+          </a:bodyPr>
+          <a:lstStyle/>
+          <a:p>
+            <a:pPr algn="l">
+              <a:lnSpc>
+                <a:spcPct val="135000"/>
+              </a:lnSpc>
+            </a:pPr>
+            <a:r>
+              <a:rPr sz="1300" b="1" i="0" spc="156">
+                <a:solidFill>
+                  <a:srgbClr val="A5335F"/>
+                </a:solidFill>
+                <a:latin typeface="Verdana"/>
+              </a:rPr>
+              <a:t>CE QU'ON ENTEND</a:t>
+            </a:r>
+          </a:p>
+        </p:txBody>
+      </p:sp>
+      <p:sp>
+        <p:nvSpPr>
+          <p:cNvPr id="6" name="TextBox 5"/>
+          <p:cNvSpPr txBox="1"/>
+          <p:nvPr/>
+        </p:nvSpPr>
+        <p:spPr>
+          <a:xfrm>
+            <a:off x="566928" y="749808"/>
+            <a:ext cx="11057839" cy="877824"/>
+          </a:xfrm>
+          <a:prstGeom prst="rect">
+            <a:avLst/>
+          </a:prstGeom>
+          <a:noFill/>
+        </p:spPr>
+        <p:txBody>
+          <a:bodyPr wrap="square" lIns="0" rIns="0" tIns="0" bIns="0" anchor="t">
+            <a:spAutoFit/>
+          </a:bodyPr>
+          <a:lstStyle/>
+          <a:p>
+            <a:pPr algn="l">
+              <a:lnSpc>
+                <a:spcPct val="115000"/>
+              </a:lnSpc>
+            </a:pPr>
+            <a:r>
+              <a:rPr sz="3400" b="1" i="0">
+                <a:solidFill>
+                  <a:srgbClr val="17181A"/>
+                </a:solidFill>
+                <a:latin typeface="Verdana"/>
+              </a:rPr>
+              <a:t>Le piège le plus fréquent</a:t>
+            </a:r>
+          </a:p>
+        </p:txBody>
+      </p:sp>
+      <p:sp>
+        <p:nvSpPr>
+          <p:cNvPr id="7" name="Rounded Rectangle 6"/>
+          <p:cNvSpPr/>
+          <p:nvPr/>
+        </p:nvSpPr>
+        <p:spPr>
+          <a:xfrm>
+            <a:off x="566928" y="1856232"/>
+            <a:ext cx="5428335" cy="2331720"/>
+          </a:xfrm>
+          <a:prstGeom prst="roundRect">
+            <a:avLst>
+              <a:gd name="adj" fmla="val 6274"/>
+            </a:avLst>
+          </a:prstGeom>
+          <a:solidFill>
+            <a:srgbClr val="FFF6F5"/>
+          </a:solidFill>
+          <a:ln w="12700">
+            <a:solidFill>
+              <a:srgbClr val="DC2626"/>
+            </a:solidFill>
+          </a:ln>
+          <a:effectLst/>
+        </p:spPr>
+        <p:style>
+          <a:lnRef idx="1">
+            <a:schemeClr val="accent1"/>
+          </a:lnRef>
+          <a:fillRef idx="3">
+            <a:schemeClr val="accent1"/>
+          </a:fillRef>
+          <a:effectRef idx="2">
+            <a:schemeClr val="accent1"/>
+          </a:effectRef>
+          <a:fontRef idx="minor">
+            <a:schemeClr val="lt1"/>
+          </a:fontRef>
+        </p:style>
+        <p:txBody>
+          <a:bodyPr rtlCol="0" anchor="ctr"/>
+          <a:lstStyle/>
+          <a:p/>
+        </p:txBody>
+      </p:sp>
+      <p:sp>
+        <p:nvSpPr>
+          <p:cNvPr id="8" name="TextBox 7"/>
+          <p:cNvSpPr txBox="1"/>
+          <p:nvPr/>
+        </p:nvSpPr>
+        <p:spPr>
+          <a:xfrm>
+            <a:off x="932688" y="2130552"/>
+            <a:ext cx="4696815" cy="274320"/>
+          </a:xfrm>
+          <a:prstGeom prst="rect">
+            <a:avLst/>
+          </a:prstGeom>
+          <a:noFill/>
+        </p:spPr>
+        <p:txBody>
+          <a:bodyPr wrap="square" lIns="0" rIns="0" tIns="0" bIns="0" anchor="t">
+            <a:spAutoFit/>
+          </a:bodyPr>
+          <a:lstStyle/>
+          <a:p>
+            <a:pPr algn="l">
+              <a:lnSpc>
+                <a:spcPct val="135000"/>
+              </a:lnSpc>
+            </a:pPr>
+            <a:r>
+              <a:rPr sz="1300" b="1" i="0" spc="156">
+                <a:solidFill>
+                  <a:srgbClr val="B91C1C"/>
+                </a:solidFill>
+                <a:latin typeface="Verdana"/>
+              </a:rPr>
+              <a:t>ON ENTEND SOUVENT</a:t>
+            </a:r>
+          </a:p>
+        </p:txBody>
+      </p:sp>
+      <p:sp>
+        <p:nvSpPr>
+          <p:cNvPr id="9" name="TextBox 8"/>
+          <p:cNvSpPr txBox="1"/>
+          <p:nvPr/>
+        </p:nvSpPr>
+        <p:spPr>
+          <a:xfrm>
+            <a:off x="932688" y="2569464"/>
+            <a:ext cx="4696815" cy="1417320"/>
+          </a:xfrm>
+          <a:prstGeom prst="rect">
+            <a:avLst/>
+          </a:prstGeom>
+          <a:noFill/>
+        </p:spPr>
+        <p:txBody>
+          <a:bodyPr wrap="square" lIns="0" rIns="0" tIns="0" bIns="0" anchor="t">
+            <a:spAutoFit/>
+          </a:bodyPr>
+          <a:lstStyle/>
+          <a:p>
+            <a:pPr algn="l">
+              <a:lnSpc>
+                <a:spcPct val="130000"/>
+              </a:lnSpc>
+            </a:pPr>
+            <a:r>
+              <a:rPr sz="2500" b="1" i="0">
+                <a:solidFill>
+                  <a:srgbClr val="17181A"/>
+                </a:solidFill>
+                <a:latin typeface="Verdana"/>
+              </a:rPr>
+              <a:t>« Qui a écrit le contenu ? »</a:t>
+            </a:r>
+          </a:p>
+        </p:txBody>
+      </p:sp>
+      <p:sp>
+        <p:nvSpPr>
+          <p:cNvPr id="10" name="Rounded Rectangle 9"/>
+          <p:cNvSpPr/>
+          <p:nvPr/>
+        </p:nvSpPr>
+        <p:spPr>
+          <a:xfrm>
+            <a:off x="6196431" y="1856232"/>
+            <a:ext cx="5428335" cy="2331720"/>
+          </a:xfrm>
+          <a:prstGeom prst="roundRect">
+            <a:avLst>
+              <a:gd name="adj" fmla="val 6274"/>
+            </a:avLst>
+          </a:prstGeom>
+          <a:solidFill>
+            <a:srgbClr val="E6F5EE"/>
+          </a:solidFill>
+          <a:ln w="12700">
+            <a:solidFill>
+              <a:srgbClr val="0A8F5B"/>
+            </a:solidFill>
+          </a:ln>
+          <a:effectLst/>
+        </p:spPr>
+        <p:style>
+          <a:lnRef idx="1">
+            <a:schemeClr val="accent1"/>
+          </a:lnRef>
+          <a:fillRef idx="3">
+            <a:schemeClr val="accent1"/>
+          </a:fillRef>
+          <a:effectRef idx="2">
+            <a:schemeClr val="accent1"/>
+          </a:effectRef>
+          <a:fontRef idx="minor">
+            <a:schemeClr val="lt1"/>
+          </a:fontRef>
+        </p:style>
+        <p:txBody>
+          <a:bodyPr rtlCol="0" anchor="ctr"/>
+          <a:lstStyle/>
+          <a:p/>
+        </p:txBody>
+      </p:sp>
+      <p:sp>
+        <p:nvSpPr>
+          <p:cNvPr id="11" name="TextBox 10"/>
+          <p:cNvSpPr txBox="1"/>
+          <p:nvPr/>
+        </p:nvSpPr>
+        <p:spPr>
+          <a:xfrm>
+            <a:off x="6562191" y="2130552"/>
+            <a:ext cx="4696815" cy="274320"/>
+          </a:xfrm>
+          <a:prstGeom prst="rect">
+            <a:avLst/>
+          </a:prstGeom>
+          <a:noFill/>
+        </p:spPr>
+        <p:txBody>
+          <a:bodyPr wrap="square" lIns="0" rIns="0" tIns="0" bIns="0" anchor="t">
+            <a:spAutoFit/>
+          </a:bodyPr>
+          <a:lstStyle/>
+          <a:p>
+            <a:pPr algn="l">
+              <a:lnSpc>
+                <a:spcPct val="135000"/>
+              </a:lnSpc>
+            </a:pPr>
+            <a:r>
+              <a:rPr sz="1300" b="1" i="0" spc="156">
+                <a:solidFill>
+                  <a:srgbClr val="07734A"/>
+                </a:solidFill>
+                <a:latin typeface="Verdana"/>
+              </a:rPr>
+              <a:t>IL FAUT DIRE PLUTÔT</a:t>
+            </a:r>
+          </a:p>
+        </p:txBody>
+      </p:sp>
+      <p:sp>
+        <p:nvSpPr>
+          <p:cNvPr id="12" name="TextBox 11"/>
+          <p:cNvSpPr txBox="1"/>
+          <p:nvPr/>
+        </p:nvSpPr>
+        <p:spPr>
+          <a:xfrm>
+            <a:off x="6562191" y="2569464"/>
+            <a:ext cx="4696815" cy="1417320"/>
+          </a:xfrm>
+          <a:prstGeom prst="rect">
+            <a:avLst/>
+          </a:prstGeom>
+          <a:noFill/>
+        </p:spPr>
+        <p:txBody>
+          <a:bodyPr wrap="square" lIns="0" rIns="0" tIns="0" bIns="0" anchor="t">
+            <a:spAutoFit/>
+          </a:bodyPr>
+          <a:lstStyle/>
+          <a:p>
+            <a:pPr algn="l">
+              <a:lnSpc>
+                <a:spcPct val="130000"/>
+              </a:lnSpc>
+            </a:pPr>
+            <a:r>
+              <a:rPr sz="2500" b="1" i="0">
+                <a:solidFill>
+                  <a:srgbClr val="17181A"/>
+                </a:solidFill>
+                <a:latin typeface="Verdana"/>
+              </a:rPr>
+              <a:t>Un enseignant de francisation.</a:t>
+            </a:r>
+          </a:p>
+        </p:txBody>
+      </p:sp>
+      <p:sp>
+        <p:nvSpPr>
+          <p:cNvPr id="13" name="Rounded Rectangle 12"/>
+          <p:cNvSpPr/>
+          <p:nvPr/>
+        </p:nvSpPr>
+        <p:spPr>
+          <a:xfrm>
+            <a:off x="566928" y="4462272"/>
+            <a:ext cx="11057839" cy="1285240"/>
+          </a:xfrm>
+          <a:prstGeom prst="roundRect">
+            <a:avLst>
+              <a:gd name="adj" fmla="val 11383"/>
+            </a:avLst>
+          </a:prstGeom>
+          <a:solidFill>
+            <a:srgbClr val="FFFFFF"/>
+          </a:solidFill>
+          <a:ln w="12700">
+            <a:solidFill>
+              <a:srgbClr val="EAEAE8"/>
+            </a:solidFill>
+          </a:ln>
+          <a:effectLst/>
+        </p:spPr>
+        <p:style>
+          <a:lnRef idx="1">
+            <a:schemeClr val="accent1"/>
+          </a:lnRef>
+          <a:fillRef idx="3">
+            <a:schemeClr val="accent1"/>
+          </a:fillRef>
+          <a:effectRef idx="2">
+            <a:schemeClr val="accent1"/>
+          </a:effectRef>
+          <a:fontRef idx="minor">
+            <a:schemeClr val="lt1"/>
+          </a:fontRef>
+        </p:style>
+        <p:txBody>
+          <a:bodyPr rtlCol="0" anchor="ctr"/>
+          <a:lstStyle/>
+          <a:p/>
+        </p:txBody>
+      </p:sp>
+      <p:sp>
+        <p:nvSpPr>
+          <p:cNvPr id="14" name="TextBox 13"/>
+          <p:cNvSpPr txBox="1"/>
+          <p:nvPr/>
+        </p:nvSpPr>
+        <p:spPr>
+          <a:xfrm>
+            <a:off x="969264" y="4736592"/>
+            <a:ext cx="10234879" cy="782320"/>
+          </a:xfrm>
+          <a:prstGeom prst="rect">
+            <a:avLst/>
+          </a:prstGeom>
+          <a:noFill/>
+        </p:spPr>
+        <p:txBody>
+          <a:bodyPr wrap="square" lIns="0" rIns="0" tIns="0" bIns="0" anchor="t">
+            <a:spAutoFit/>
+          </a:bodyPr>
+          <a:lstStyle/>
+          <a:p>
+            <a:pPr algn="l">
+              <a:lnSpc>
+                <a:spcPct val="145000"/>
+              </a:lnSpc>
+            </a:pPr>
+            <a:r>
+              <a:rPr sz="2000" b="0" i="0">
+                <a:solidFill>
+                  <a:srgbClr val="4B4F52"/>
+                </a:solidFill>
+                <a:latin typeface="Verdana"/>
+              </a:rPr>
+              <a:t>Le contenu est écrit à partir du programme du Ministère, situation par situation — jamais recopié d'un manuel existant.</a:t>
+            </a:r>
+          </a:p>
+        </p:txBody>
+      </p:sp>
+    </p:spTree>
+  </p:cSld>
+  <p:clrMapOvr>
+    <a:masterClrMapping/>
+  </p:clrMapOvr>
+</p:sld>
+</file>
+
+<file path=ppt/slides/slide12.xml><?xml version="1.0" encoding="utf-8"?>
+<p:sld xmlns:a="http://schemas.openxmlformats.org/drawingml/2006/main" xmlns:p="http://schemas.openxmlformats.org/presentationml/2006/main" xmlns:r="http://schemas.openxmlformats.org/officeDocument/2006/relationships">
+  <p:cSld>
+    <p:spTree>
+      <p:nvGrpSpPr>
+        <p:cNvPr id="1" name=""/>
+        <p:cNvGrpSpPr/>
+        <p:nvPr/>
+      </p:nvGrpSpPr>
+      <p:grpSpPr/>
+      <p:sp>
+        <p:nvSpPr>
+          <p:cNvPr id="2" name="Rectangle 1"/>
+          <p:cNvSpPr/>
+          <p:nvPr/>
+        </p:nvSpPr>
+        <p:spPr>
+          <a:xfrm>
+            <a:off x="0" y="0"/>
+            <a:ext cx="12191695" cy="6858000"/>
+          </a:xfrm>
+          <a:prstGeom prst="rect">
+            <a:avLst/>
+          </a:prstGeom>
+          <a:solidFill>
+            <a:srgbClr val="F7F7F5"/>
+          </a:solidFill>
+          <a:ln>
+            <a:noFill/>
+          </a:ln>
+          <a:effectLst/>
+        </p:spPr>
+        <p:style>
+          <a:lnRef idx="1">
+            <a:schemeClr val="accent1"/>
+          </a:lnRef>
+          <a:fillRef idx="3">
+            <a:schemeClr val="accent1"/>
+          </a:fillRef>
+          <a:effectRef idx="2">
+            <a:schemeClr val="accent1"/>
+          </a:effectRef>
+          <a:fontRef idx="minor">
+            <a:schemeClr val="lt1"/>
+          </a:fontRef>
+        </p:style>
+        <p:txBody>
+          <a:bodyPr rtlCol="0" anchor="ctr"/>
+          <a:lstStyle/>
+          <a:p/>
+        </p:txBody>
+      </p:sp>
+      <p:sp>
+        <p:nvSpPr>
+          <p:cNvPr id="3" name="TextBox 2"/>
+          <p:cNvSpPr txBox="1"/>
+          <p:nvPr/>
+        </p:nvSpPr>
+        <p:spPr>
+          <a:xfrm>
+            <a:off x="566928" y="6355080"/>
+            <a:ext cx="6400800" cy="219456"/>
+          </a:xfrm>
+          <a:prstGeom prst="rect">
+            <a:avLst/>
+          </a:prstGeom>
+          <a:noFill/>
+        </p:spPr>
+        <p:txBody>
+          <a:bodyPr wrap="square" lIns="0" rIns="0" tIns="0" bIns="0" anchor="t">
+            <a:spAutoFit/>
+          </a:bodyPr>
+          <a:lstStyle/>
+          <a:p>
+            <a:pPr algn="l">
+              <a:lnSpc>
+                <a:spcPct val="135000"/>
+              </a:lnSpc>
+            </a:pPr>
+            <a:r>
+              <a:rPr sz="1200" b="0" i="0">
+                <a:solidFill>
+                  <a:srgbClr val="6E7175"/>
+                </a:solidFill>
+                <a:latin typeface="Verdana"/>
+              </a:rPr>
+              <a:t>A5 · francis · présentation</a:t>
+            </a:r>
+          </a:p>
+        </p:txBody>
+      </p:sp>
+      <p:sp>
+        <p:nvSpPr>
+          <p:cNvPr id="4" name="TextBox 3"/>
+          <p:cNvSpPr txBox="1"/>
+          <p:nvPr/>
+        </p:nvSpPr>
+        <p:spPr>
+          <a:xfrm>
+            <a:off x="10710367" y="6355080"/>
+            <a:ext cx="914400" cy="219456"/>
+          </a:xfrm>
+          <a:prstGeom prst="rect">
+            <a:avLst/>
+          </a:prstGeom>
+          <a:noFill/>
+        </p:spPr>
+        <p:txBody>
+          <a:bodyPr wrap="square" lIns="0" rIns="0" tIns="0" bIns="0" anchor="t">
+            <a:spAutoFit/>
+          </a:bodyPr>
+          <a:lstStyle/>
+          <a:p>
+            <a:pPr algn="r">
+              <a:lnSpc>
+                <a:spcPct val="135000"/>
+              </a:lnSpc>
+            </a:pPr>
+            <a:r>
+              <a:rPr sz="1200" b="0" i="0">
+                <a:solidFill>
+                  <a:srgbClr val="6E7175"/>
+                </a:solidFill>
+                <a:latin typeface="Verdana"/>
+              </a:rPr>
+              <a:t>12</a:t>
+            </a:r>
+          </a:p>
+        </p:txBody>
+      </p:sp>
+      <p:sp>
+        <p:nvSpPr>
+          <p:cNvPr id="5" name="TextBox 4"/>
+          <p:cNvSpPr txBox="1"/>
+          <p:nvPr/>
+        </p:nvSpPr>
+        <p:spPr>
+          <a:xfrm>
+            <a:off x="566928" y="420624"/>
+            <a:ext cx="11057839" cy="237744"/>
+          </a:xfrm>
+          <a:prstGeom prst="rect">
+            <a:avLst/>
+          </a:prstGeom>
+          <a:noFill/>
+        </p:spPr>
+        <p:txBody>
+          <a:bodyPr wrap="square" lIns="0" rIns="0" tIns="0" bIns="0" anchor="t">
+            <a:spAutoFit/>
+          </a:bodyPr>
+          <a:lstStyle/>
+          <a:p>
+            <a:pPr algn="l">
+              <a:lnSpc>
+                <a:spcPct val="135000"/>
+              </a:lnSpc>
+            </a:pPr>
+            <a:r>
+              <a:rPr sz="1300" b="1" i="0" spc="156">
+                <a:solidFill>
+                  <a:srgbClr val="A5335F"/>
+                </a:solidFill>
+                <a:latin typeface="Verdana"/>
+              </a:rPr>
+              <a:t>CE QU'ON ENTEND</a:t>
+            </a:r>
+          </a:p>
+        </p:txBody>
+      </p:sp>
+      <p:sp>
+        <p:nvSpPr>
+          <p:cNvPr id="6" name="TextBox 5"/>
+          <p:cNvSpPr txBox="1"/>
+          <p:nvPr/>
+        </p:nvSpPr>
+        <p:spPr>
+          <a:xfrm>
+            <a:off x="566928" y="749808"/>
+            <a:ext cx="11057839" cy="877824"/>
+          </a:xfrm>
+          <a:prstGeom prst="rect">
+            <a:avLst/>
+          </a:prstGeom>
+          <a:noFill/>
+        </p:spPr>
+        <p:txBody>
+          <a:bodyPr wrap="square" lIns="0" rIns="0" tIns="0" bIns="0" anchor="t">
+            <a:spAutoFit/>
+          </a:bodyPr>
+          <a:lstStyle/>
+          <a:p>
+            <a:pPr algn="l">
+              <a:lnSpc>
+                <a:spcPct val="115000"/>
+              </a:lnSpc>
+            </a:pPr>
+            <a:r>
+              <a:rPr sz="3400" b="1" i="0">
+                <a:solidFill>
+                  <a:srgbClr val="17181A"/>
+                </a:solidFill>
+                <a:latin typeface="Verdana"/>
+              </a:rPr>
+              <a:t>Le piège le plus fréquent</a:t>
+            </a:r>
+          </a:p>
+        </p:txBody>
+      </p:sp>
+      <p:sp>
+        <p:nvSpPr>
+          <p:cNvPr id="7" name="Rounded Rectangle 6"/>
+          <p:cNvSpPr/>
+          <p:nvPr/>
+        </p:nvSpPr>
+        <p:spPr>
+          <a:xfrm>
+            <a:off x="566928" y="1856232"/>
+            <a:ext cx="5428335" cy="2331720"/>
+          </a:xfrm>
+          <a:prstGeom prst="roundRect">
+            <a:avLst>
+              <a:gd name="adj" fmla="val 6274"/>
+            </a:avLst>
+          </a:prstGeom>
+          <a:solidFill>
+            <a:srgbClr val="FFF6F5"/>
+          </a:solidFill>
+          <a:ln w="12700">
+            <a:solidFill>
+              <a:srgbClr val="DC2626"/>
+            </a:solidFill>
+          </a:ln>
+          <a:effectLst/>
+        </p:spPr>
+        <p:style>
+          <a:lnRef idx="1">
+            <a:schemeClr val="accent1"/>
+          </a:lnRef>
+          <a:fillRef idx="3">
+            <a:schemeClr val="accent1"/>
+          </a:fillRef>
+          <a:effectRef idx="2">
+            <a:schemeClr val="accent1"/>
+          </a:effectRef>
+          <a:fontRef idx="minor">
+            <a:schemeClr val="lt1"/>
+          </a:fontRef>
+        </p:style>
+        <p:txBody>
+          <a:bodyPr rtlCol="0" anchor="ctr"/>
+          <a:lstStyle/>
+          <a:p/>
+        </p:txBody>
+      </p:sp>
+      <p:sp>
+        <p:nvSpPr>
+          <p:cNvPr id="8" name="TextBox 7"/>
+          <p:cNvSpPr txBox="1"/>
+          <p:nvPr/>
+        </p:nvSpPr>
+        <p:spPr>
+          <a:xfrm>
+            <a:off x="932688" y="2130552"/>
+            <a:ext cx="4696815" cy="274320"/>
+          </a:xfrm>
+          <a:prstGeom prst="rect">
+            <a:avLst/>
+          </a:prstGeom>
+          <a:noFill/>
+        </p:spPr>
+        <p:txBody>
+          <a:bodyPr wrap="square" lIns="0" rIns="0" tIns="0" bIns="0" anchor="t">
+            <a:spAutoFit/>
+          </a:bodyPr>
+          <a:lstStyle/>
+          <a:p>
+            <a:pPr algn="l">
+              <a:lnSpc>
+                <a:spcPct val="135000"/>
+              </a:lnSpc>
+            </a:pPr>
+            <a:r>
+              <a:rPr sz="1300" b="1" i="0" spc="156">
+                <a:solidFill>
+                  <a:srgbClr val="B91C1C"/>
+                </a:solidFill>
+                <a:latin typeface="Verdana"/>
+              </a:rPr>
+              <a:t>ON ENTEND SOUVENT</a:t>
+            </a:r>
+          </a:p>
+        </p:txBody>
+      </p:sp>
+      <p:sp>
+        <p:nvSpPr>
+          <p:cNvPr id="9" name="TextBox 8"/>
+          <p:cNvSpPr txBox="1"/>
+          <p:nvPr/>
+        </p:nvSpPr>
+        <p:spPr>
+          <a:xfrm>
+            <a:off x="932688" y="2569464"/>
+            <a:ext cx="4696815" cy="1417320"/>
+          </a:xfrm>
+          <a:prstGeom prst="rect">
+            <a:avLst/>
+          </a:prstGeom>
+          <a:noFill/>
+        </p:spPr>
+        <p:txBody>
+          <a:bodyPr wrap="square" lIns="0" rIns="0" tIns="0" bIns="0" anchor="t">
+            <a:spAutoFit/>
+          </a:bodyPr>
+          <a:lstStyle/>
+          <a:p>
+            <a:pPr algn="l">
+              <a:lnSpc>
+                <a:spcPct val="130000"/>
+              </a:lnSpc>
+            </a:pPr>
+            <a:r>
+              <a:rPr sz="2500" b="1" i="0">
+                <a:solidFill>
+                  <a:srgbClr val="17181A"/>
+                </a:solidFill>
+                <a:latin typeface="Verdana"/>
+              </a:rPr>
+              <a:t>« Nos élèves n'ont pas d'ordinateur. »</a:t>
+            </a:r>
+          </a:p>
+        </p:txBody>
+      </p:sp>
+      <p:sp>
+        <p:nvSpPr>
+          <p:cNvPr id="10" name="Rounded Rectangle 9"/>
+          <p:cNvSpPr/>
+          <p:nvPr/>
+        </p:nvSpPr>
+        <p:spPr>
+          <a:xfrm>
+            <a:off x="6196431" y="1856232"/>
+            <a:ext cx="5428335" cy="2331720"/>
+          </a:xfrm>
+          <a:prstGeom prst="roundRect">
+            <a:avLst>
+              <a:gd name="adj" fmla="val 6274"/>
+            </a:avLst>
+          </a:prstGeom>
+          <a:solidFill>
+            <a:srgbClr val="E6F5EE"/>
+          </a:solidFill>
+          <a:ln w="12700">
+            <a:solidFill>
+              <a:srgbClr val="0A8F5B"/>
+            </a:solidFill>
+          </a:ln>
+          <a:effectLst/>
+        </p:spPr>
+        <p:style>
+          <a:lnRef idx="1">
+            <a:schemeClr val="accent1"/>
+          </a:lnRef>
+          <a:fillRef idx="3">
+            <a:schemeClr val="accent1"/>
+          </a:fillRef>
+          <a:effectRef idx="2">
+            <a:schemeClr val="accent1"/>
+          </a:effectRef>
+          <a:fontRef idx="minor">
+            <a:schemeClr val="lt1"/>
+          </a:fontRef>
+        </p:style>
+        <p:txBody>
+          <a:bodyPr rtlCol="0" anchor="ctr"/>
+          <a:lstStyle/>
+          <a:p/>
+        </p:txBody>
+      </p:sp>
+      <p:sp>
+        <p:nvSpPr>
+          <p:cNvPr id="11" name="TextBox 10"/>
+          <p:cNvSpPr txBox="1"/>
+          <p:nvPr/>
+        </p:nvSpPr>
+        <p:spPr>
+          <a:xfrm>
+            <a:off x="6562191" y="2130552"/>
+            <a:ext cx="4696815" cy="274320"/>
+          </a:xfrm>
+          <a:prstGeom prst="rect">
+            <a:avLst/>
+          </a:prstGeom>
+          <a:noFill/>
+        </p:spPr>
+        <p:txBody>
+          <a:bodyPr wrap="square" lIns="0" rIns="0" tIns="0" bIns="0" anchor="t">
+            <a:spAutoFit/>
+          </a:bodyPr>
+          <a:lstStyle/>
+          <a:p>
+            <a:pPr algn="l">
+              <a:lnSpc>
+                <a:spcPct val="135000"/>
+              </a:lnSpc>
+            </a:pPr>
+            <a:r>
+              <a:rPr sz="1300" b="1" i="0" spc="156">
+                <a:solidFill>
+                  <a:srgbClr val="07734A"/>
+                </a:solidFill>
+                <a:latin typeface="Verdana"/>
+              </a:rPr>
+              <a:t>IL FAUT DIRE PLUTÔT</a:t>
+            </a:r>
+          </a:p>
+        </p:txBody>
+      </p:sp>
+      <p:sp>
+        <p:nvSpPr>
+          <p:cNvPr id="12" name="TextBox 11"/>
+          <p:cNvSpPr txBox="1"/>
+          <p:nvPr/>
+        </p:nvSpPr>
+        <p:spPr>
+          <a:xfrm>
+            <a:off x="6562191" y="2569464"/>
+            <a:ext cx="4696815" cy="1417320"/>
+          </a:xfrm>
+          <a:prstGeom prst="rect">
+            <a:avLst/>
+          </a:prstGeom>
+          <a:noFill/>
+        </p:spPr>
+        <p:txBody>
+          <a:bodyPr wrap="square" lIns="0" rIns="0" tIns="0" bIns="0" anchor="t">
+            <a:spAutoFit/>
+          </a:bodyPr>
+          <a:lstStyle/>
+          <a:p>
+            <a:pPr algn="l">
+              <a:lnSpc>
+                <a:spcPct val="130000"/>
+              </a:lnSpc>
+            </a:pPr>
+            <a:r>
+              <a:rPr sz="2500" b="1" i="0">
+                <a:solidFill>
+                  <a:srgbClr val="17181A"/>
+                </a:solidFill>
+                <a:latin typeface="Verdana"/>
+              </a:rPr>
+              <a:t>Le cours entier se fait sur un téléphone.</a:t>
+            </a:r>
+          </a:p>
+        </p:txBody>
+      </p:sp>
+      <p:sp>
+        <p:nvSpPr>
+          <p:cNvPr id="13" name="Rounded Rectangle 12"/>
+          <p:cNvSpPr/>
+          <p:nvPr/>
+        </p:nvSpPr>
+        <p:spPr>
+          <a:xfrm>
+            <a:off x="566928" y="4462272"/>
+            <a:ext cx="11057839" cy="1285240"/>
+          </a:xfrm>
+          <a:prstGeom prst="roundRect">
+            <a:avLst>
+              <a:gd name="adj" fmla="val 11383"/>
+            </a:avLst>
+          </a:prstGeom>
+          <a:solidFill>
+            <a:srgbClr val="FFFFFF"/>
+          </a:solidFill>
+          <a:ln w="12700">
+            <a:solidFill>
+              <a:srgbClr val="EAEAE8"/>
+            </a:solidFill>
+          </a:ln>
+          <a:effectLst/>
+        </p:spPr>
+        <p:style>
+          <a:lnRef idx="1">
+            <a:schemeClr val="accent1"/>
+          </a:lnRef>
+          <a:fillRef idx="3">
+            <a:schemeClr val="accent1"/>
+          </a:fillRef>
+          <a:effectRef idx="2">
+            <a:schemeClr val="accent1"/>
+          </a:effectRef>
+          <a:fontRef idx="minor">
+            <a:schemeClr val="lt1"/>
+          </a:fontRef>
+        </p:style>
+        <p:txBody>
+          <a:bodyPr rtlCol="0" anchor="ctr"/>
+          <a:lstStyle/>
+          <a:p/>
+        </p:txBody>
+      </p:sp>
+      <p:sp>
+        <p:nvSpPr>
+          <p:cNvPr id="14" name="TextBox 13"/>
+          <p:cNvSpPr txBox="1"/>
+          <p:nvPr/>
+        </p:nvSpPr>
+        <p:spPr>
+          <a:xfrm>
+            <a:off x="969264" y="4736592"/>
+            <a:ext cx="10234879" cy="782320"/>
+          </a:xfrm>
+          <a:prstGeom prst="rect">
+            <a:avLst/>
+          </a:prstGeom>
+          <a:noFill/>
+        </p:spPr>
+        <p:txBody>
+          <a:bodyPr wrap="square" lIns="0" rIns="0" tIns="0" bIns="0" anchor="t">
+            <a:spAutoFit/>
+          </a:bodyPr>
+          <a:lstStyle/>
+          <a:p>
+            <a:pPr algn="l">
+              <a:lnSpc>
+                <a:spcPct val="145000"/>
+              </a:lnSpc>
+            </a:pPr>
+            <a:r>
+              <a:rPr sz="2000" b="0" i="0">
+                <a:solidFill>
+                  <a:srgbClr val="4B4F52"/>
+                </a:solidFill>
+                <a:latin typeface="Verdana"/>
+              </a:rPr>
+              <a:t>Les sept familles d'exercices, l'enregistrement de la voix, le dépôt d'un texte. Et la fiche papier existe pour ceux qui n'ont rien.</a:t>
+            </a:r>
+          </a:p>
+        </p:txBody>
+      </p:sp>
+    </p:spTree>
+  </p:cSld>
+  <p:clrMapOvr>
+    <a:masterClrMapping/>
+  </p:clrMapOvr>
+</p:sld>
+</file>
+
+<file path=ppt/slides/slide13.xml><?xml version="1.0" encoding="utf-8"?>
+<p:sld xmlns:a="http://schemas.openxmlformats.org/drawingml/2006/main" xmlns:p="http://schemas.openxmlformats.org/presentationml/2006/main" xmlns:r="http://schemas.openxmlformats.org/officeDocument/2006/relationships">
+  <p:cSld>
+    <p:spTree>
+      <p:nvGrpSpPr>
+        <p:cNvPr id="1" name=""/>
+        <p:cNvGrpSpPr/>
+        <p:nvPr/>
+      </p:nvGrpSpPr>
+      <p:grpSpPr/>
+      <p:sp>
+        <p:nvSpPr>
+          <p:cNvPr id="2" name="Rectangle 1"/>
+          <p:cNvSpPr/>
+          <p:nvPr/>
+        </p:nvSpPr>
+        <p:spPr>
+          <a:xfrm>
+            <a:off x="0" y="0"/>
+            <a:ext cx="12191695" cy="6858000"/>
+          </a:xfrm>
+          <a:prstGeom prst="rect">
+            <a:avLst/>
+          </a:prstGeom>
+          <a:solidFill>
+            <a:srgbClr val="F7F7F5"/>
+          </a:solidFill>
+          <a:ln>
+            <a:noFill/>
+          </a:ln>
+          <a:effectLst/>
+        </p:spPr>
+        <p:style>
+          <a:lnRef idx="1">
+            <a:schemeClr val="accent1"/>
+          </a:lnRef>
+          <a:fillRef idx="3">
+            <a:schemeClr val="accent1"/>
+          </a:fillRef>
+          <a:effectRef idx="2">
+            <a:schemeClr val="accent1"/>
+          </a:effectRef>
+          <a:fontRef idx="minor">
+            <a:schemeClr val="lt1"/>
+          </a:fontRef>
+        </p:style>
+        <p:txBody>
+          <a:bodyPr rtlCol="0" anchor="ctr"/>
+          <a:lstStyle/>
+          <a:p/>
+        </p:txBody>
+      </p:sp>
+      <p:sp>
+        <p:nvSpPr>
+          <p:cNvPr id="3" name="TextBox 2"/>
+          <p:cNvSpPr txBox="1"/>
+          <p:nvPr/>
+        </p:nvSpPr>
+        <p:spPr>
+          <a:xfrm>
+            <a:off x="566928" y="6355080"/>
+            <a:ext cx="6400800" cy="219456"/>
+          </a:xfrm>
+          <a:prstGeom prst="rect">
+            <a:avLst/>
+          </a:prstGeom>
+          <a:noFill/>
+        </p:spPr>
+        <p:txBody>
+          <a:bodyPr wrap="square" lIns="0" rIns="0" tIns="0" bIns="0" anchor="t">
+            <a:spAutoFit/>
+          </a:bodyPr>
+          <a:lstStyle/>
+          <a:p>
+            <a:pPr algn="l">
+              <a:lnSpc>
+                <a:spcPct val="135000"/>
+              </a:lnSpc>
+            </a:pPr>
+            <a:r>
+              <a:rPr sz="1200" b="0" i="0">
+                <a:solidFill>
+                  <a:srgbClr val="6E7175"/>
+                </a:solidFill>
+                <a:latin typeface="Verdana"/>
+              </a:rPr>
+              <a:t>A5 · francis · présentation</a:t>
+            </a:r>
+          </a:p>
+        </p:txBody>
+      </p:sp>
+      <p:sp>
+        <p:nvSpPr>
+          <p:cNvPr id="4" name="TextBox 3"/>
+          <p:cNvSpPr txBox="1"/>
+          <p:nvPr/>
+        </p:nvSpPr>
+        <p:spPr>
+          <a:xfrm>
+            <a:off x="10710367" y="6355080"/>
+            <a:ext cx="914400" cy="219456"/>
+          </a:xfrm>
+          <a:prstGeom prst="rect">
+            <a:avLst/>
+          </a:prstGeom>
+          <a:noFill/>
+        </p:spPr>
+        <p:txBody>
+          <a:bodyPr wrap="square" lIns="0" rIns="0" tIns="0" bIns="0" anchor="t">
+            <a:spAutoFit/>
+          </a:bodyPr>
+          <a:lstStyle/>
+          <a:p>
+            <a:pPr algn="r">
+              <a:lnSpc>
+                <a:spcPct val="135000"/>
+              </a:lnSpc>
+            </a:pPr>
+            <a:r>
+              <a:rPr sz="1200" b="0" i="0">
+                <a:solidFill>
+                  <a:srgbClr val="6E7175"/>
+                </a:solidFill>
+                <a:latin typeface="Verdana"/>
+              </a:rPr>
+              <a:t>13</a:t>
+            </a:r>
+          </a:p>
+        </p:txBody>
+      </p:sp>
+      <p:sp>
+        <p:nvSpPr>
+          <p:cNvPr id="5" name="TextBox 4"/>
+          <p:cNvSpPr txBox="1"/>
+          <p:nvPr/>
+        </p:nvSpPr>
+        <p:spPr>
+          <a:xfrm>
+            <a:off x="566928" y="420624"/>
+            <a:ext cx="11057839" cy="237744"/>
+          </a:xfrm>
+          <a:prstGeom prst="rect">
+            <a:avLst/>
+          </a:prstGeom>
+          <a:noFill/>
+        </p:spPr>
+        <p:txBody>
+          <a:bodyPr wrap="square" lIns="0" rIns="0" tIns="0" bIns="0" anchor="t">
+            <a:spAutoFit/>
+          </a:bodyPr>
+          <a:lstStyle/>
+          <a:p>
+            <a:pPr algn="l">
+              <a:lnSpc>
+                <a:spcPct val="135000"/>
+              </a:lnSpc>
+            </a:pPr>
+            <a:r>
+              <a:rPr sz="1300" b="1" i="0" spc="156">
+                <a:solidFill>
+                  <a:srgbClr val="A5335F"/>
+                </a:solidFill>
+                <a:latin typeface="Verdana"/>
+              </a:rPr>
+              <a:t>LA PREUVE</a:t>
+            </a:r>
+          </a:p>
+        </p:txBody>
+      </p:sp>
+      <p:sp>
+        <p:nvSpPr>
+          <p:cNvPr id="6" name="TextBox 5"/>
+          <p:cNvSpPr txBox="1"/>
+          <p:nvPr/>
+        </p:nvSpPr>
+        <p:spPr>
+          <a:xfrm>
+            <a:off x="566928" y="749808"/>
+            <a:ext cx="11057839" cy="877824"/>
+          </a:xfrm>
+          <a:prstGeom prst="rect">
+            <a:avLst/>
+          </a:prstGeom>
+          <a:noFill/>
+        </p:spPr>
+        <p:txBody>
+          <a:bodyPr wrap="square" lIns="0" rIns="0" tIns="0" bIns="0" anchor="t">
+            <a:spAutoFit/>
+          </a:bodyPr>
+          <a:lstStyle/>
+          <a:p>
+            <a:pPr algn="l">
+              <a:lnSpc>
+                <a:spcPct val="115000"/>
+              </a:lnSpc>
+            </a:pPr>
+            <a:r>
+              <a:rPr sz="3400" b="1" i="0">
+                <a:solidFill>
+                  <a:srgbClr val="17181A"/>
+                </a:solidFill>
+                <a:latin typeface="Verdana"/>
+              </a:rPr>
+              <a:t>Le cours entier, sur un téléphone</a:t>
+            </a:r>
+          </a:p>
+        </p:txBody>
+      </p:sp>
+      <p:sp>
+        <p:nvSpPr>
+          <p:cNvPr id="7" name="TextBox 6"/>
+          <p:cNvSpPr txBox="1"/>
+          <p:nvPr/>
+        </p:nvSpPr>
+        <p:spPr>
+          <a:xfrm>
+            <a:off x="566928" y="1645920"/>
+            <a:ext cx="11057839" cy="308610"/>
+          </a:xfrm>
+          <a:prstGeom prst="rect">
+            <a:avLst/>
+          </a:prstGeom>
+          <a:noFill/>
+        </p:spPr>
+        <p:txBody>
+          <a:bodyPr wrap="square" lIns="0" rIns="0" tIns="0" bIns="0" anchor="t">
+            <a:spAutoFit/>
+          </a:bodyPr>
+          <a:lstStyle/>
+          <a:p>
+            <a:pPr algn="l">
+              <a:lnSpc>
+                <a:spcPct val="135000"/>
+              </a:lnSpc>
+            </a:pPr>
+            <a:r>
+              <a:rPr sz="1800" b="0" i="0">
+                <a:solidFill>
+                  <a:srgbClr val="6E7175"/>
+                </a:solidFill>
+                <a:latin typeface="Verdana"/>
+              </a:rPr>
+              <a:t>Le cours entier se fait sur un téléphone.</a:t>
+            </a:r>
+          </a:p>
+        </p:txBody>
+      </p:sp>
+      <p:sp>
+        <p:nvSpPr>
+          <p:cNvPr id="8" name="Rounded Rectangle 7"/>
+          <p:cNvSpPr/>
+          <p:nvPr/>
+        </p:nvSpPr>
+        <p:spPr>
+          <a:xfrm>
+            <a:off x="5138013" y="2064257"/>
+            <a:ext cx="1915668" cy="4107942"/>
+          </a:xfrm>
+          <a:prstGeom prst="roundRect">
+            <a:avLst>
+              <a:gd name="adj" fmla="val 4773"/>
+            </a:avLst>
+          </a:prstGeom>
+          <a:solidFill>
+            <a:srgbClr val="FFFFFF"/>
+          </a:solidFill>
+          <a:ln w="12700">
+            <a:solidFill>
+              <a:srgbClr val="D6D6D2"/>
+            </a:solidFill>
+          </a:ln>
+          <a:effectLst/>
+        </p:spPr>
+        <p:style>
+          <a:lnRef idx="1">
+            <a:schemeClr val="accent1"/>
+          </a:lnRef>
+          <a:fillRef idx="3">
+            <a:schemeClr val="accent1"/>
+          </a:fillRef>
+          <a:effectRef idx="2">
+            <a:schemeClr val="accent1"/>
+          </a:effectRef>
+          <a:fontRef idx="minor">
+            <a:schemeClr val="lt1"/>
+          </a:fontRef>
+        </p:style>
+        <p:txBody>
+          <a:bodyPr rtlCol="0" anchor="ctr"/>
+          <a:lstStyle/>
+          <a:p/>
+        </p:txBody>
+      </p:sp>
+      <p:pic>
+        <p:nvPicPr>
+          <p:cNvPr id="9" name="Picture 8" descr="tel-02-portail-cours.png"/>
+          <p:cNvPicPr>
+            <a:picLocks noChangeAspect="1"/>
+          </p:cNvPicPr>
+          <p:nvPr/>
+        </p:nvPicPr>
+        <p:blipFill>
+          <a:blip r:embed="rId2"/>
+          <a:stretch>
+            <a:fillRect/>
+          </a:stretch>
+        </p:blipFill>
+        <p:spPr>
+          <a:xfrm>
+            <a:off x="5156301" y="2082545"/>
+            <a:ext cx="1879092" cy="4071366"/>
+          </a:xfrm>
+          <a:prstGeom prst="rect">
+            <a:avLst/>
+          </a:prstGeom>
+        </p:spPr>
+      </p:pic>
+    </p:spTree>
+  </p:cSld>
+  <p:clrMapOvr>
+    <a:masterClrMapping/>
+  </p:clrMapOvr>
+</p:sld>
+</file>
+
+<file path=ppt/slides/slide14.xml><?xml version="1.0" encoding="utf-8"?>
+<p:sld xmlns:a="http://schemas.openxmlformats.org/drawingml/2006/main" xmlns:p="http://schemas.openxmlformats.org/presentationml/2006/main" xmlns:r="http://schemas.openxmlformats.org/officeDocument/2006/relationships">
+  <p:cSld>
+    <p:spTree>
+      <p:nvGrpSpPr>
+        <p:cNvPr id="1" name=""/>
+        <p:cNvGrpSpPr/>
+        <p:nvPr/>
+      </p:nvGrpSpPr>
+      <p:grpSpPr/>
+      <p:sp>
+        <p:nvSpPr>
+          <p:cNvPr id="2" name="Rectangle 1"/>
+          <p:cNvSpPr/>
+          <p:nvPr/>
+        </p:nvSpPr>
+        <p:spPr>
+          <a:xfrm>
+            <a:off x="0" y="0"/>
+            <a:ext cx="12191695" cy="6858000"/>
+          </a:xfrm>
+          <a:prstGeom prst="rect">
+            <a:avLst/>
+          </a:prstGeom>
+          <a:solidFill>
+            <a:srgbClr val="F7F7F5"/>
+          </a:solidFill>
+          <a:ln>
+            <a:noFill/>
+          </a:ln>
+          <a:effectLst/>
+        </p:spPr>
+        <p:style>
+          <a:lnRef idx="1">
+            <a:schemeClr val="accent1"/>
+          </a:lnRef>
+          <a:fillRef idx="3">
+            <a:schemeClr val="accent1"/>
+          </a:fillRef>
+          <a:effectRef idx="2">
+            <a:schemeClr val="accent1"/>
+          </a:effectRef>
+          <a:fontRef idx="minor">
+            <a:schemeClr val="lt1"/>
+          </a:fontRef>
+        </p:style>
+        <p:txBody>
+          <a:bodyPr rtlCol="0" anchor="ctr"/>
+          <a:lstStyle/>
+          <a:p/>
+        </p:txBody>
+      </p:sp>
+      <p:sp>
+        <p:nvSpPr>
+          <p:cNvPr id="3" name="TextBox 2"/>
+          <p:cNvSpPr txBox="1"/>
+          <p:nvPr/>
+        </p:nvSpPr>
+        <p:spPr>
+          <a:xfrm>
+            <a:off x="566928" y="6355080"/>
+            <a:ext cx="6400800" cy="219456"/>
+          </a:xfrm>
+          <a:prstGeom prst="rect">
+            <a:avLst/>
+          </a:prstGeom>
+          <a:noFill/>
+        </p:spPr>
+        <p:txBody>
+          <a:bodyPr wrap="square" lIns="0" rIns="0" tIns="0" bIns="0" anchor="t">
+            <a:spAutoFit/>
+          </a:bodyPr>
+          <a:lstStyle/>
+          <a:p>
+            <a:pPr algn="l">
+              <a:lnSpc>
+                <a:spcPct val="135000"/>
+              </a:lnSpc>
+            </a:pPr>
+            <a:r>
+              <a:rPr sz="1200" b="0" i="0">
+                <a:solidFill>
+                  <a:srgbClr val="6E7175"/>
+                </a:solidFill>
+                <a:latin typeface="Verdana"/>
+              </a:rPr>
+              <a:t>A5 · francis · présentation</a:t>
+            </a:r>
+          </a:p>
+        </p:txBody>
+      </p:sp>
+      <p:sp>
+        <p:nvSpPr>
+          <p:cNvPr id="4" name="TextBox 3"/>
+          <p:cNvSpPr txBox="1"/>
+          <p:nvPr/>
+        </p:nvSpPr>
+        <p:spPr>
+          <a:xfrm>
+            <a:off x="10710367" y="6355080"/>
+            <a:ext cx="914400" cy="219456"/>
+          </a:xfrm>
+          <a:prstGeom prst="rect">
+            <a:avLst/>
+          </a:prstGeom>
+          <a:noFill/>
+        </p:spPr>
+        <p:txBody>
+          <a:bodyPr wrap="square" lIns="0" rIns="0" tIns="0" bIns="0" anchor="t">
+            <a:spAutoFit/>
+          </a:bodyPr>
+          <a:lstStyle/>
+          <a:p>
+            <a:pPr algn="r">
+              <a:lnSpc>
+                <a:spcPct val="135000"/>
+              </a:lnSpc>
+            </a:pPr>
+            <a:r>
+              <a:rPr sz="1200" b="0" i="0">
+                <a:solidFill>
+                  <a:srgbClr val="6E7175"/>
+                </a:solidFill>
+                <a:latin typeface="Verdana"/>
+              </a:rPr>
+              <a:t>14</a:t>
+            </a:r>
+          </a:p>
+        </p:txBody>
+      </p:sp>
+      <p:sp>
+        <p:nvSpPr>
           <p:cNvPr id="5" name="Rectangle 4"/>
           <p:cNvSpPr/>
           <p:nvPr/>
@@ -5964,7 +8220,7 @@
                 </a:solidFill>
                 <a:latin typeface="Verdana"/>
               </a:rPr>
-              <a:t>CE QU'ON ENTEND</a:t>
+              <a:t>LA PREUVE</a:t>
             </a:r>
           </a:p>
         </p:txBody>
@@ -6003,33 +8259,72 @@
                 </a:solidFill>
                 <a:latin typeface="Verdana"/>
               </a:rPr>
-              <a:t>Le piège le plus fréquent</a:t>
-            </a:r>
-          </a:p>
-        </p:txBody>
-      </p:sp>
-      <p:sp>
-        <p:nvSpPr>
-          <p:cNvPr id="7" name="Rounded Rectangle 6"/>
+              <a:t>Le module, assistance fermée</a:t>
+            </a:r>
+          </a:p>
+        </p:txBody>
+      </p:sp>
+      <p:sp>
+        <p:nvSpPr>
+          <p:cNvPr id="7" name="TextBox 6"/>
+          <p:cNvSpPr txBox="1"/>
+          <p:nvPr/>
+        </p:nvSpPr>
+        <p:spPr>
+          <a:xfrm>
+            <a:off x="566928" y="1645920"/>
+            <a:ext cx="11057839" cy="308610"/>
+          </a:xfrm>
+          <a:prstGeom prst="rect">
+            <a:avLst/>
+          </a:prstGeom>
+          <a:noFill/>
+        </p:spPr>
+        <p:txBody>
+          <a:bodyPr wrap="square" lIns="0" rIns="0" tIns="0" bIns="0" anchor="t">
+            <a:spAutoFit/>
+          </a:bodyPr>
+          <a:lstStyle/>
+          <a:p>
+            <a:pPr algn="l">
+              <a:lnSpc>
+                <a:spcPct val="135000"/>
+              </a:lnSpc>
+            </a:pPr>
+            <a:r>
+              <a:rPr sz="1800" b="0" i="0">
+                <a:solidFill>
+                  <a:srgbClr val="6E7175"/>
+                </a:solidFill>
+                <a:latin typeface="Verdana"/>
+              </a:rPr>
+              <a:t>Alors ne l'ouvrez pas.</a:t>
+            </a:r>
+          </a:p>
+        </p:txBody>
+      </p:sp>
+      <p:sp>
+        <p:nvSpPr>
+          <p:cNvPr id="8" name="Rounded Rectangle 7"/>
           <p:cNvSpPr/>
           <p:nvPr/>
         </p:nvSpPr>
         <p:spPr>
           <a:xfrm>
-            <a:off x="566928" y="1856232"/>
-            <a:ext cx="5428335" cy="2331720"/>
+            <a:off x="4333657" y="2064257"/>
+            <a:ext cx="3524379" cy="4107942"/>
           </a:xfrm>
           <a:prstGeom prst="roundRect">
             <a:avLst>
-              <a:gd name="adj" fmla="val 6274"/>
+              <a:gd name="adj" fmla="val 2594"/>
             </a:avLst>
           </a:prstGeom>
           <a:solidFill>
-            <a:srgbClr val="FFF6F5"/>
+            <a:srgbClr val="FFFFFF"/>
           </a:solidFill>
           <a:ln w="12700">
             <a:solidFill>
-              <a:srgbClr val="DC2626"/>
+              <a:srgbClr val="D6D6D2"/>
             </a:solidFill>
           </a:ln>
           <a:effectLst/>
@@ -6054,293 +8349,30 @@
           <a:p/>
         </p:txBody>
       </p:sp>
-      <p:sp>
-        <p:nvSpPr>
-          <p:cNvPr id="8" name="TextBox 7"/>
-          <p:cNvSpPr txBox="1"/>
-          <p:nvPr/>
-        </p:nvSpPr>
-        <p:spPr>
-          <a:xfrm>
-            <a:off x="932688" y="2130552"/>
-            <a:ext cx="4696815" cy="274320"/>
-          </a:xfrm>
-          <a:prstGeom prst="rect">
-            <a:avLst/>
-          </a:prstGeom>
-          <a:noFill/>
-        </p:spPr>
-        <p:txBody>
-          <a:bodyPr wrap="square" lIns="0" rIns="0" tIns="0" bIns="0" anchor="t">
-            <a:spAutoFit/>
-          </a:bodyPr>
-          <a:lstStyle/>
-          <a:p>
-            <a:pPr algn="l">
-              <a:lnSpc>
-                <a:spcPct val="135000"/>
-              </a:lnSpc>
-            </a:pPr>
-            <a:r>
-              <a:rPr sz="1300" b="1" i="0" spc="156">
-                <a:solidFill>
-                  <a:srgbClr val="B91C1C"/>
-                </a:solidFill>
-                <a:latin typeface="Verdana"/>
-              </a:rPr>
-              <a:t>ON ENTEND SOUVENT</a:t>
-            </a:r>
-          </a:p>
-        </p:txBody>
-      </p:sp>
-      <p:sp>
-        <p:nvSpPr>
-          <p:cNvPr id="9" name="TextBox 8"/>
-          <p:cNvSpPr txBox="1"/>
-          <p:nvPr/>
-        </p:nvSpPr>
-        <p:spPr>
-          <a:xfrm>
-            <a:off x="932688" y="2569464"/>
-            <a:ext cx="4696815" cy="1417320"/>
-          </a:xfrm>
-          <a:prstGeom prst="rect">
-            <a:avLst/>
-          </a:prstGeom>
-          <a:noFill/>
-        </p:spPr>
-        <p:txBody>
-          <a:bodyPr wrap="square" lIns="0" rIns="0" tIns="0" bIns="0" anchor="t">
-            <a:spAutoFit/>
-          </a:bodyPr>
-          <a:lstStyle/>
-          <a:p>
-            <a:pPr algn="l">
-              <a:lnSpc>
-                <a:spcPct val="130000"/>
-              </a:lnSpc>
-            </a:pPr>
-            <a:r>
-              <a:rPr sz="2500" b="1" i="0">
-                <a:solidFill>
-                  <a:srgbClr val="17181A"/>
-                </a:solidFill>
-                <a:latin typeface="Verdana"/>
-              </a:rPr>
-              <a:t>« Où sont hébergées les données ? Faut-il que ce soit au Québec ? »</a:t>
-            </a:r>
-          </a:p>
-        </p:txBody>
-      </p:sp>
-      <p:sp>
-        <p:nvSpPr>
-          <p:cNvPr id="10" name="Rounded Rectangle 9"/>
-          <p:cNvSpPr/>
-          <p:nvPr/>
-        </p:nvSpPr>
-        <p:spPr>
-          <a:xfrm>
-            <a:off x="6196431" y="1856232"/>
-            <a:ext cx="5428335" cy="2331720"/>
-          </a:xfrm>
-          <a:prstGeom prst="roundRect">
-            <a:avLst>
-              <a:gd name="adj" fmla="val 6274"/>
-            </a:avLst>
-          </a:prstGeom>
-          <a:solidFill>
-            <a:srgbClr val="E6F5EE"/>
-          </a:solidFill>
-          <a:ln w="12700">
-            <a:solidFill>
-              <a:srgbClr val="0A8F5B"/>
-            </a:solidFill>
-          </a:ln>
-          <a:effectLst/>
-        </p:spPr>
-        <p:style>
-          <a:lnRef idx="1">
-            <a:schemeClr val="accent1"/>
-          </a:lnRef>
-          <a:fillRef idx="3">
-            <a:schemeClr val="accent1"/>
-          </a:fillRef>
-          <a:effectRef idx="2">
-            <a:schemeClr val="accent1"/>
-          </a:effectRef>
-          <a:fontRef idx="minor">
-            <a:schemeClr val="lt1"/>
-          </a:fontRef>
-        </p:style>
-        <p:txBody>
-          <a:bodyPr rtlCol="0" anchor="ctr"/>
-          <a:lstStyle/>
-          <a:p/>
-        </p:txBody>
-      </p:sp>
-      <p:sp>
-        <p:nvSpPr>
-          <p:cNvPr id="11" name="TextBox 10"/>
-          <p:cNvSpPr txBox="1"/>
-          <p:nvPr/>
-        </p:nvSpPr>
-        <p:spPr>
-          <a:xfrm>
-            <a:off x="6562191" y="2130552"/>
-            <a:ext cx="4696815" cy="274320"/>
-          </a:xfrm>
-          <a:prstGeom prst="rect">
-            <a:avLst/>
-          </a:prstGeom>
-          <a:noFill/>
-        </p:spPr>
-        <p:txBody>
-          <a:bodyPr wrap="square" lIns="0" rIns="0" tIns="0" bIns="0" anchor="t">
-            <a:spAutoFit/>
-          </a:bodyPr>
-          <a:lstStyle/>
-          <a:p>
-            <a:pPr algn="l">
-              <a:lnSpc>
-                <a:spcPct val="135000"/>
-              </a:lnSpc>
-            </a:pPr>
-            <a:r>
-              <a:rPr sz="1300" b="1" i="0" spc="156">
-                <a:solidFill>
-                  <a:srgbClr val="07734A"/>
-                </a:solidFill>
-                <a:latin typeface="Verdana"/>
-              </a:rPr>
-              <a:t>IL FAUT DIRE PLUTÔT</a:t>
-            </a:r>
-          </a:p>
-        </p:txBody>
-      </p:sp>
-      <p:sp>
-        <p:nvSpPr>
-          <p:cNvPr id="12" name="TextBox 11"/>
-          <p:cNvSpPr txBox="1"/>
-          <p:nvPr/>
-        </p:nvSpPr>
-        <p:spPr>
-          <a:xfrm>
-            <a:off x="6562191" y="2569464"/>
-            <a:ext cx="4696815" cy="1417320"/>
-          </a:xfrm>
-          <a:prstGeom prst="rect">
-            <a:avLst/>
-          </a:prstGeom>
-          <a:noFill/>
-        </p:spPr>
-        <p:txBody>
-          <a:bodyPr wrap="square" lIns="0" rIns="0" tIns="0" bIns="0" anchor="t">
-            <a:spAutoFit/>
-          </a:bodyPr>
-          <a:lstStyle/>
-          <a:p>
-            <a:pPr algn="l">
-              <a:lnSpc>
-                <a:spcPct val="130000"/>
-              </a:lnSpc>
-            </a:pPr>
-            <a:r>
-              <a:rPr sz="2500" b="1" i="0">
-                <a:solidFill>
-                  <a:srgbClr val="17181A"/>
-                </a:solidFill>
-                <a:latin typeface="Verdana"/>
-              </a:rPr>
-              <a:t>Rien d'identifiant n'a besoin d'exister.</a:t>
-            </a:r>
-          </a:p>
-        </p:txBody>
-      </p:sp>
-      <p:sp>
-        <p:nvSpPr>
-          <p:cNvPr id="13" name="Rounded Rectangle 12"/>
-          <p:cNvSpPr/>
-          <p:nvPr/>
-        </p:nvSpPr>
-        <p:spPr>
-          <a:xfrm>
-            <a:off x="566928" y="4462272"/>
-            <a:ext cx="11057839" cy="1285240"/>
-          </a:xfrm>
-          <a:prstGeom prst="roundRect">
-            <a:avLst>
-              <a:gd name="adj" fmla="val 11383"/>
-            </a:avLst>
-          </a:prstGeom>
-          <a:solidFill>
-            <a:srgbClr val="FFFFFF"/>
-          </a:solidFill>
-          <a:ln w="12700">
-            <a:solidFill>
-              <a:srgbClr val="EAEAE8"/>
-            </a:solidFill>
-          </a:ln>
-          <a:effectLst/>
-        </p:spPr>
-        <p:style>
-          <a:lnRef idx="1">
-            <a:schemeClr val="accent1"/>
-          </a:lnRef>
-          <a:fillRef idx="3">
-            <a:schemeClr val="accent1"/>
-          </a:fillRef>
-          <a:effectRef idx="2">
-            <a:schemeClr val="accent1"/>
-          </a:effectRef>
-          <a:fontRef idx="minor">
-            <a:schemeClr val="lt1"/>
-          </a:fontRef>
-        </p:style>
-        <p:txBody>
-          <a:bodyPr rtlCol="0" anchor="ctr"/>
-          <a:lstStyle/>
-          <a:p/>
-        </p:txBody>
-      </p:sp>
-      <p:sp>
-        <p:nvSpPr>
-          <p:cNvPr id="14" name="TextBox 13"/>
-          <p:cNvSpPr txBox="1"/>
-          <p:nvPr/>
-        </p:nvSpPr>
-        <p:spPr>
-          <a:xfrm>
-            <a:off x="969264" y="4736592"/>
-            <a:ext cx="10234879" cy="782320"/>
-          </a:xfrm>
-          <a:prstGeom prst="rect">
-            <a:avLst/>
-          </a:prstGeom>
-          <a:noFill/>
-        </p:spPr>
-        <p:txBody>
-          <a:bodyPr wrap="square" lIns="0" rIns="0" tIns="0" bIns="0" anchor="t">
-            <a:spAutoFit/>
-          </a:bodyPr>
-          <a:lstStyle/>
-          <a:p>
-            <a:pPr algn="l">
-              <a:lnSpc>
-                <a:spcPct val="145000"/>
-              </a:lnSpc>
-            </a:pPr>
-            <a:r>
-              <a:rPr sz="2000" b="0" i="0">
-                <a:solidFill>
-                  <a:srgbClr val="4B4F52"/>
-                </a:solidFill>
-                <a:latin typeface="Verdana"/>
-              </a:rPr>
-              <a:t>En mode séance, l'élève n'a ni compte, ni pseudonyme, ni trace qui lui survive à la soirée. La question de l'hébergement se pose alors sur du vide.</a:t>
-            </a:r>
-          </a:p>
-        </p:txBody>
-      </p:sp>
+      <p:pic>
+        <p:nvPicPr>
+          <p:cNvPr id="9" name="Picture 8" descr="cas-08-module-sans-ia.png"/>
+          <p:cNvPicPr>
+            <a:picLocks noChangeAspect="1"/>
+          </p:cNvPicPr>
+          <p:nvPr/>
+        </p:nvPicPr>
+        <p:blipFill>
+          <a:blip r:embed="rId2"/>
+          <a:stretch>
+            <a:fillRect/>
+          </a:stretch>
+        </p:blipFill>
+        <p:spPr>
+          <a:xfrm>
+            <a:off x="4351945" y="2082545"/>
+            <a:ext cx="3487803" cy="4071366"/>
+          </a:xfrm>
+          <a:prstGeom prst="rect">
+            <a:avLst/>
+          </a:prstGeom>
+        </p:spPr>
+      </p:pic>
     </p:spTree>
   </p:cSld>
   <p:clrMapOvr>
@@ -6676,7 +8708,7 @@
                 </a:solidFill>
                 <a:latin typeface="Verdana"/>
               </a:rPr>
-              <a:t>« Il faut créer des comptes pour tous nos élèves ? »</a:t>
+              <a:t>« Où sont hébergées les données ? Faut-il que ce soit au Québec ? »</a:t>
             </a:r>
           </a:p>
         </p:txBody>
@@ -6800,7 +8832,7 @@
                 </a:solidFill>
                 <a:latin typeface="Verdana"/>
               </a:rPr>
-              <a:t>Non. Une feuille photocopiée suffit.</a:t>
+              <a:t>Rien d'identifiant n'a besoin d'exister.</a:t>
             </a:r>
           </a:p>
         </p:txBody>
@@ -6885,7 +8917,7 @@
                 </a:solidFill>
                 <a:latin typeface="Verdana"/>
               </a:rPr>
-              <a:t>Un code à six caractères, un code QR, et la classe travaille. Le suivi de l'enseignant est exactement le même écran.</a:t>
+              <a:t>En mode séance, l'élève n'a ni compte, ni pseudonyme, ni trace qui lui survive à la soirée. La question de l'hébergement se pose alors sur du vide.</a:t>
             </a:r>
           </a:p>
         </p:txBody>
@@ -7062,7 +9094,7 @@
                 </a:solidFill>
                 <a:latin typeface="Verdana"/>
               </a:rPr>
-              <a:t>CE QU'ON ENTEND</a:t>
+              <a:t>LA PREUVE</a:t>
             </a:r>
           </a:p>
         </p:txBody>
@@ -7101,33 +9133,72 @@
                 </a:solidFill>
                 <a:latin typeface="Verdana"/>
               </a:rPr>
-              <a:t>Le piège le plus fréquent</a:t>
-            </a:r>
-          </a:p>
-        </p:txBody>
-      </p:sp>
-      <p:sp>
-        <p:nvSpPr>
-          <p:cNvPr id="7" name="Rounded Rectangle 6"/>
+              <a:t>Une classe entière, sans un compte</a:t>
+            </a:r>
+          </a:p>
+        </p:txBody>
+      </p:sp>
+      <p:sp>
+        <p:nvSpPr>
+          <p:cNvPr id="7" name="TextBox 6"/>
+          <p:cNvSpPr txBox="1"/>
+          <p:nvPr/>
+        </p:nvSpPr>
+        <p:spPr>
+          <a:xfrm>
+            <a:off x="566928" y="1645920"/>
+            <a:ext cx="11057839" cy="308610"/>
+          </a:xfrm>
+          <a:prstGeom prst="rect">
+            <a:avLst/>
+          </a:prstGeom>
+          <a:noFill/>
+        </p:spPr>
+        <p:txBody>
+          <a:bodyPr wrap="square" lIns="0" rIns="0" tIns="0" bIns="0" anchor="t">
+            <a:spAutoFit/>
+          </a:bodyPr>
+          <a:lstStyle/>
+          <a:p>
+            <a:pPr algn="l">
+              <a:lnSpc>
+                <a:spcPct val="135000"/>
+              </a:lnSpc>
+            </a:pPr>
+            <a:r>
+              <a:rPr sz="1800" b="0" i="0">
+                <a:solidFill>
+                  <a:srgbClr val="6E7175"/>
+                </a:solidFill>
+                <a:latin typeface="Verdana"/>
+              </a:rPr>
+              <a:t>Rien d'identifiant n'a besoin d'exister.</a:t>
+            </a:r>
+          </a:p>
+        </p:txBody>
+      </p:sp>
+      <p:sp>
+        <p:nvSpPr>
+          <p:cNvPr id="8" name="Rounded Rectangle 7"/>
           <p:cNvSpPr/>
           <p:nvPr/>
         </p:nvSpPr>
         <p:spPr>
           <a:xfrm>
-            <a:off x="566928" y="1856232"/>
-            <a:ext cx="5428335" cy="2331720"/>
+            <a:off x="4577939" y="2064257"/>
+            <a:ext cx="3035815" cy="4107942"/>
           </a:xfrm>
           <a:prstGeom prst="roundRect">
             <a:avLst>
-              <a:gd name="adj" fmla="val 6274"/>
+              <a:gd name="adj" fmla="val 3012"/>
             </a:avLst>
           </a:prstGeom>
           <a:solidFill>
-            <a:srgbClr val="FFF6F5"/>
+            <a:srgbClr val="FFFFFF"/>
           </a:solidFill>
           <a:ln w="12700">
             <a:solidFill>
-              <a:srgbClr val="DC2626"/>
+              <a:srgbClr val="D6D6D2"/>
             </a:solidFill>
           </a:ln>
           <a:effectLst/>
@@ -7152,293 +9223,30 @@
           <a:p/>
         </p:txBody>
       </p:sp>
-      <p:sp>
-        <p:nvSpPr>
-          <p:cNvPr id="8" name="TextBox 7"/>
-          <p:cNvSpPr txBox="1"/>
-          <p:nvPr/>
-        </p:nvSpPr>
-        <p:spPr>
-          <a:xfrm>
-            <a:off x="932688" y="2130552"/>
-            <a:ext cx="4696815" cy="274320"/>
-          </a:xfrm>
-          <a:prstGeom prst="rect">
-            <a:avLst/>
-          </a:prstGeom>
-          <a:noFill/>
-        </p:spPr>
-        <p:txBody>
-          <a:bodyPr wrap="square" lIns="0" rIns="0" tIns="0" bIns="0" anchor="t">
-            <a:spAutoFit/>
-          </a:bodyPr>
-          <a:lstStyle/>
-          <a:p>
-            <a:pPr algn="l">
-              <a:lnSpc>
-                <a:spcPct val="135000"/>
-              </a:lnSpc>
-            </a:pPr>
-            <a:r>
-              <a:rPr sz="1300" b="1" i="0" spc="156">
-                <a:solidFill>
-                  <a:srgbClr val="B91C1C"/>
-                </a:solidFill>
-                <a:latin typeface="Verdana"/>
-              </a:rPr>
-              <a:t>ON ENTEND SOUVENT</a:t>
-            </a:r>
-          </a:p>
-        </p:txBody>
-      </p:sp>
-      <p:sp>
-        <p:nvSpPr>
-          <p:cNvPr id="9" name="TextBox 8"/>
-          <p:cNvSpPr txBox="1"/>
-          <p:nvPr/>
-        </p:nvSpPr>
-        <p:spPr>
-          <a:xfrm>
-            <a:off x="932688" y="2569464"/>
-            <a:ext cx="4696815" cy="1417320"/>
-          </a:xfrm>
-          <a:prstGeom prst="rect">
-            <a:avLst/>
-          </a:prstGeom>
-          <a:noFill/>
-        </p:spPr>
-        <p:txBody>
-          <a:bodyPr wrap="square" lIns="0" rIns="0" tIns="0" bIns="0" anchor="t">
-            <a:spAutoFit/>
-          </a:bodyPr>
-          <a:lstStyle/>
-          <a:p>
-            <a:pPr algn="l">
-              <a:lnSpc>
-                <a:spcPct val="130000"/>
-              </a:lnSpc>
-            </a:pPr>
-            <a:r>
-              <a:rPr sz="2500" b="1" i="0">
-                <a:solidFill>
-                  <a:srgbClr val="17181A"/>
-                </a:solidFill>
-                <a:latin typeface="Verdana"/>
-              </a:rPr>
-              <a:t>« Combien ça coûte ? »</a:t>
-            </a:r>
-          </a:p>
-        </p:txBody>
-      </p:sp>
-      <p:sp>
-        <p:nvSpPr>
-          <p:cNvPr id="10" name="Rounded Rectangle 9"/>
-          <p:cNvSpPr/>
-          <p:nvPr/>
-        </p:nvSpPr>
-        <p:spPr>
-          <a:xfrm>
-            <a:off x="6196431" y="1856232"/>
-            <a:ext cx="5428335" cy="2331720"/>
-          </a:xfrm>
-          <a:prstGeom prst="roundRect">
-            <a:avLst>
-              <a:gd name="adj" fmla="val 6274"/>
-            </a:avLst>
-          </a:prstGeom>
-          <a:solidFill>
-            <a:srgbClr val="E6F5EE"/>
-          </a:solidFill>
-          <a:ln w="12700">
-            <a:solidFill>
-              <a:srgbClr val="0A8F5B"/>
-            </a:solidFill>
-          </a:ln>
-          <a:effectLst/>
-        </p:spPr>
-        <p:style>
-          <a:lnRef idx="1">
-            <a:schemeClr val="accent1"/>
-          </a:lnRef>
-          <a:fillRef idx="3">
-            <a:schemeClr val="accent1"/>
-          </a:fillRef>
-          <a:effectRef idx="2">
-            <a:schemeClr val="accent1"/>
-          </a:effectRef>
-          <a:fontRef idx="minor">
-            <a:schemeClr val="lt1"/>
-          </a:fontRef>
-        </p:style>
-        <p:txBody>
-          <a:bodyPr rtlCol="0" anchor="ctr"/>
-          <a:lstStyle/>
-          <a:p/>
-        </p:txBody>
-      </p:sp>
-      <p:sp>
-        <p:nvSpPr>
-          <p:cNvPr id="11" name="TextBox 10"/>
-          <p:cNvSpPr txBox="1"/>
-          <p:nvPr/>
-        </p:nvSpPr>
-        <p:spPr>
-          <a:xfrm>
-            <a:off x="6562191" y="2130552"/>
-            <a:ext cx="4696815" cy="274320"/>
-          </a:xfrm>
-          <a:prstGeom prst="rect">
-            <a:avLst/>
-          </a:prstGeom>
-          <a:noFill/>
-        </p:spPr>
-        <p:txBody>
-          <a:bodyPr wrap="square" lIns="0" rIns="0" tIns="0" bIns="0" anchor="t">
-            <a:spAutoFit/>
-          </a:bodyPr>
-          <a:lstStyle/>
-          <a:p>
-            <a:pPr algn="l">
-              <a:lnSpc>
-                <a:spcPct val="135000"/>
-              </a:lnSpc>
-            </a:pPr>
-            <a:r>
-              <a:rPr sz="1300" b="1" i="0" spc="156">
-                <a:solidFill>
-                  <a:srgbClr val="07734A"/>
-                </a:solidFill>
-                <a:latin typeface="Verdana"/>
-              </a:rPr>
-              <a:t>IL FAUT DIRE PLUTÔT</a:t>
-            </a:r>
-          </a:p>
-        </p:txBody>
-      </p:sp>
-      <p:sp>
-        <p:nvSpPr>
-          <p:cNvPr id="12" name="TextBox 11"/>
-          <p:cNvSpPr txBox="1"/>
-          <p:nvPr/>
-        </p:nvSpPr>
-        <p:spPr>
-          <a:xfrm>
-            <a:off x="6562191" y="2569464"/>
-            <a:ext cx="4696815" cy="1417320"/>
-          </a:xfrm>
-          <a:prstGeom prst="rect">
-            <a:avLst/>
-          </a:prstGeom>
-          <a:noFill/>
-        </p:spPr>
-        <p:txBody>
-          <a:bodyPr wrap="square" lIns="0" rIns="0" tIns="0" bIns="0" anchor="t">
-            <a:spAutoFit/>
-          </a:bodyPr>
-          <a:lstStyle/>
-          <a:p>
-            <a:pPr algn="l">
-              <a:lnSpc>
-                <a:spcPct val="130000"/>
-              </a:lnSpc>
-            </a:pPr>
-            <a:r>
-              <a:rPr sz="2500" b="1" i="0">
-                <a:solidFill>
-                  <a:srgbClr val="17181A"/>
-                </a:solidFill>
-                <a:latin typeface="Verdana"/>
-              </a:rPr>
-              <a:t>Ce qu'on mesure, pas ce qu'on estime.</a:t>
-            </a:r>
-          </a:p>
-        </p:txBody>
-      </p:sp>
-      <p:sp>
-        <p:nvSpPr>
-          <p:cNvPr id="13" name="Rounded Rectangle 12"/>
-          <p:cNvSpPr/>
-          <p:nvPr/>
-        </p:nvSpPr>
-        <p:spPr>
-          <a:xfrm>
-            <a:off x="566928" y="4462272"/>
-            <a:ext cx="11057839" cy="1285240"/>
-          </a:xfrm>
-          <a:prstGeom prst="roundRect">
-            <a:avLst>
-              <a:gd name="adj" fmla="val 11383"/>
-            </a:avLst>
-          </a:prstGeom>
-          <a:solidFill>
-            <a:srgbClr val="FFFFFF"/>
-          </a:solidFill>
-          <a:ln w="12700">
-            <a:solidFill>
-              <a:srgbClr val="EAEAE8"/>
-            </a:solidFill>
-          </a:ln>
-          <a:effectLst/>
-        </p:spPr>
-        <p:style>
-          <a:lnRef idx="1">
-            <a:schemeClr val="accent1"/>
-          </a:lnRef>
-          <a:fillRef idx="3">
-            <a:schemeClr val="accent1"/>
-          </a:fillRef>
-          <a:effectRef idx="2">
-            <a:schemeClr val="accent1"/>
-          </a:effectRef>
-          <a:fontRef idx="minor">
-            <a:schemeClr val="lt1"/>
-          </a:fontRef>
-        </p:style>
-        <p:txBody>
-          <a:bodyPr rtlCol="0" anchor="ctr"/>
-          <a:lstStyle/>
-          <a:p/>
-        </p:txBody>
-      </p:sp>
-      <p:sp>
-        <p:nvSpPr>
-          <p:cNvPr id="14" name="TextBox 13"/>
-          <p:cNvSpPr txBox="1"/>
-          <p:nvPr/>
-        </p:nvSpPr>
-        <p:spPr>
-          <a:xfrm>
-            <a:off x="969264" y="4736592"/>
-            <a:ext cx="10234879" cy="782320"/>
-          </a:xfrm>
-          <a:prstGeom prst="rect">
-            <a:avLst/>
-          </a:prstGeom>
-          <a:noFill/>
-        </p:spPr>
-        <p:txBody>
-          <a:bodyPr wrap="square" lIns="0" rIns="0" tIns="0" bIns="0" anchor="t">
-            <a:spAutoFit/>
-          </a:bodyPr>
-          <a:lstStyle/>
-          <a:p>
-            <a:pPr algn="l">
-              <a:lnSpc>
-                <a:spcPct val="145000"/>
-              </a:lnSpc>
-            </a:pPr>
-            <a:r>
-              <a:rPr sz="2000" b="0" i="0">
-                <a:solidFill>
-                  <a:srgbClr val="4B4F52"/>
-                </a:solidFill>
-                <a:latin typeface="Verdana"/>
-              </a:rPr>
-              <a:t>Chaque appel à un modèle est inscrit dans un registre, avec ses jetons. Un centre qui ferme l'assistant ne paie plus rien à l'usage.</a:t>
-            </a:r>
-          </a:p>
-        </p:txBody>
-      </p:sp>
+      <p:pic>
+        <p:nvPicPr>
+          <p:cNvPr id="9" name="Picture 8" descr="cas-04-suivi-seance.png"/>
+          <p:cNvPicPr>
+            <a:picLocks noChangeAspect="1"/>
+          </p:cNvPicPr>
+          <p:nvPr/>
+        </p:nvPicPr>
+        <p:blipFill>
+          <a:blip r:embed="rId2"/>
+          <a:stretch>
+            <a:fillRect/>
+          </a:stretch>
+        </p:blipFill>
+        <p:spPr>
+          <a:xfrm>
+            <a:off x="4596227" y="2082545"/>
+            <a:ext cx="2999239" cy="4071366"/>
+          </a:xfrm>
+          <a:prstGeom prst="rect">
+            <a:avLst/>
+          </a:prstGeom>
+        </p:spPr>
+      </p:pic>
     </p:spTree>
   </p:cSld>
   <p:clrMapOvr>
@@ -7774,7 +9582,7 @@
                 </a:solidFill>
                 <a:latin typeface="Verdana"/>
               </a:rPr>
-              <a:t>« Est-ce que ça remplace l'enseignant ? »</a:t>
+              <a:t>« Il faut créer des comptes pour tous nos élèves ? »</a:t>
             </a:r>
           </a:p>
         </p:txBody>
@@ -7898,7 +9706,7 @@
                 </a:solidFill>
                 <a:latin typeface="Verdana"/>
               </a:rPr>
-              <a:t>Il n'y a pas de cours sans lui.</a:t>
+              <a:t>Non. Une feuille photocopiée suffit.</a:t>
             </a:r>
           </a:p>
         </p:txBody>
@@ -7983,7 +9791,7 @@
                 </a:solidFill>
                 <a:latin typeface="Verdana"/>
               </a:rPr>
-              <a:t>C'est l'enseignant qui ouvre un module, qui décide de la séance, qui lit les productions. Rien ne s'ouvre tout seul à un élève.</a:t>
+              <a:t>Un code à six caractères, un code QR, et la classe travaille. Le suivi de l'enseignant est exactement le même écran.</a:t>
             </a:r>
           </a:p>
         </p:txBody>
@@ -8160,7 +9968,7 @@
                 </a:solidFill>
                 <a:latin typeface="Verdana"/>
               </a:rPr>
-              <a:t>CE QU'ON ENTEND</a:t>
+              <a:t>LA PREUVE</a:t>
             </a:r>
           </a:p>
         </p:txBody>
@@ -8199,33 +10007,72 @@
                 </a:solidFill>
                 <a:latin typeface="Verdana"/>
               </a:rPr>
-              <a:t>Le piège le plus fréquent</a:t>
-            </a:r>
-          </a:p>
-        </p:txBody>
-      </p:sp>
-      <p:sp>
-        <p:nvSpPr>
-          <p:cNvPr id="7" name="Rounded Rectangle 6"/>
+              <a:t>Ce qu'on photocopie</a:t>
+            </a:r>
+          </a:p>
+        </p:txBody>
+      </p:sp>
+      <p:sp>
+        <p:nvSpPr>
+          <p:cNvPr id="7" name="TextBox 6"/>
+          <p:cNvSpPr txBox="1"/>
+          <p:nvPr/>
+        </p:nvSpPr>
+        <p:spPr>
+          <a:xfrm>
+            <a:off x="566928" y="1645920"/>
+            <a:ext cx="11057839" cy="308610"/>
+          </a:xfrm>
+          <a:prstGeom prst="rect">
+            <a:avLst/>
+          </a:prstGeom>
+          <a:noFill/>
+        </p:spPr>
+        <p:txBody>
+          <a:bodyPr wrap="square" lIns="0" rIns="0" tIns="0" bIns="0" anchor="t">
+            <a:spAutoFit/>
+          </a:bodyPr>
+          <a:lstStyle/>
+          <a:p>
+            <a:pPr algn="l">
+              <a:lnSpc>
+                <a:spcPct val="135000"/>
+              </a:lnSpc>
+            </a:pPr>
+            <a:r>
+              <a:rPr sz="1800" b="0" i="0">
+                <a:solidFill>
+                  <a:srgbClr val="6E7175"/>
+                </a:solidFill>
+                <a:latin typeface="Verdana"/>
+              </a:rPr>
+              <a:t>Non. Une feuille photocopiée suffit.</a:t>
+            </a:r>
+          </a:p>
+        </p:txBody>
+      </p:sp>
+      <p:sp>
+        <p:nvSpPr>
+          <p:cNvPr id="8" name="Rounded Rectangle 7"/>
           <p:cNvSpPr/>
           <p:nvPr/>
         </p:nvSpPr>
         <p:spPr>
           <a:xfrm>
-            <a:off x="566928" y="1856232"/>
-            <a:ext cx="5428335" cy="2331720"/>
+            <a:off x="4478869" y="2064257"/>
+            <a:ext cx="3233955" cy="4107942"/>
           </a:xfrm>
           <a:prstGeom prst="roundRect">
             <a:avLst>
-              <a:gd name="adj" fmla="val 6274"/>
+              <a:gd name="adj" fmla="val 2827"/>
             </a:avLst>
           </a:prstGeom>
           <a:solidFill>
-            <a:srgbClr val="FFF6F5"/>
+            <a:srgbClr val="FFFFFF"/>
           </a:solidFill>
           <a:ln w="12700">
             <a:solidFill>
-              <a:srgbClr val="DC2626"/>
+              <a:srgbClr val="D6D6D2"/>
             </a:solidFill>
           </a:ln>
           <a:effectLst/>
@@ -8250,293 +10097,30 @@
           <a:p/>
         </p:txBody>
       </p:sp>
-      <p:sp>
-        <p:nvSpPr>
-          <p:cNvPr id="8" name="TextBox 7"/>
-          <p:cNvSpPr txBox="1"/>
-          <p:nvPr/>
-        </p:nvSpPr>
-        <p:spPr>
-          <a:xfrm>
-            <a:off x="932688" y="2130552"/>
-            <a:ext cx="4696815" cy="274320"/>
-          </a:xfrm>
-          <a:prstGeom prst="rect">
-            <a:avLst/>
-          </a:prstGeom>
-          <a:noFill/>
-        </p:spPr>
-        <p:txBody>
-          <a:bodyPr wrap="square" lIns="0" rIns="0" tIns="0" bIns="0" anchor="t">
-            <a:spAutoFit/>
-          </a:bodyPr>
-          <a:lstStyle/>
-          <a:p>
-            <a:pPr algn="l">
-              <a:lnSpc>
-                <a:spcPct val="135000"/>
-              </a:lnSpc>
-            </a:pPr>
-            <a:r>
-              <a:rPr sz="1300" b="1" i="0" spc="156">
-                <a:solidFill>
-                  <a:srgbClr val="B91C1C"/>
-                </a:solidFill>
-                <a:latin typeface="Verdana"/>
-              </a:rPr>
-              <a:t>ON ENTEND SOUVENT</a:t>
-            </a:r>
-          </a:p>
-        </p:txBody>
-      </p:sp>
-      <p:sp>
-        <p:nvSpPr>
-          <p:cNvPr id="9" name="TextBox 8"/>
-          <p:cNvSpPr txBox="1"/>
-          <p:nvPr/>
-        </p:nvSpPr>
-        <p:spPr>
-          <a:xfrm>
-            <a:off x="932688" y="2569464"/>
-            <a:ext cx="4696815" cy="1417320"/>
-          </a:xfrm>
-          <a:prstGeom prst="rect">
-            <a:avLst/>
-          </a:prstGeom>
-          <a:noFill/>
-        </p:spPr>
-        <p:txBody>
-          <a:bodyPr wrap="square" lIns="0" rIns="0" tIns="0" bIns="0" anchor="t">
-            <a:spAutoFit/>
-          </a:bodyPr>
-          <a:lstStyle/>
-          <a:p>
-            <a:pPr algn="l">
-              <a:lnSpc>
-                <a:spcPct val="130000"/>
-              </a:lnSpc>
-            </a:pPr>
-            <a:r>
-              <a:rPr sz="2500" b="1" i="0">
-                <a:solidFill>
-                  <a:srgbClr val="17181A"/>
-                </a:solidFill>
-                <a:latin typeface="Verdana"/>
-              </a:rPr>
-              <a:t>« Qui a écrit le contenu ? »</a:t>
-            </a:r>
-          </a:p>
-        </p:txBody>
-      </p:sp>
-      <p:sp>
-        <p:nvSpPr>
-          <p:cNvPr id="10" name="Rounded Rectangle 9"/>
-          <p:cNvSpPr/>
-          <p:nvPr/>
-        </p:nvSpPr>
-        <p:spPr>
-          <a:xfrm>
-            <a:off x="6196431" y="1856232"/>
-            <a:ext cx="5428335" cy="2331720"/>
-          </a:xfrm>
-          <a:prstGeom prst="roundRect">
-            <a:avLst>
-              <a:gd name="adj" fmla="val 6274"/>
-            </a:avLst>
-          </a:prstGeom>
-          <a:solidFill>
-            <a:srgbClr val="E6F5EE"/>
-          </a:solidFill>
-          <a:ln w="12700">
-            <a:solidFill>
-              <a:srgbClr val="0A8F5B"/>
-            </a:solidFill>
-          </a:ln>
-          <a:effectLst/>
-        </p:spPr>
-        <p:style>
-          <a:lnRef idx="1">
-            <a:schemeClr val="accent1"/>
-          </a:lnRef>
-          <a:fillRef idx="3">
-            <a:schemeClr val="accent1"/>
-          </a:fillRef>
-          <a:effectRef idx="2">
-            <a:schemeClr val="accent1"/>
-          </a:effectRef>
-          <a:fontRef idx="minor">
-            <a:schemeClr val="lt1"/>
-          </a:fontRef>
-        </p:style>
-        <p:txBody>
-          <a:bodyPr rtlCol="0" anchor="ctr"/>
-          <a:lstStyle/>
-          <a:p/>
-        </p:txBody>
-      </p:sp>
-      <p:sp>
-        <p:nvSpPr>
-          <p:cNvPr id="11" name="TextBox 10"/>
-          <p:cNvSpPr txBox="1"/>
-          <p:nvPr/>
-        </p:nvSpPr>
-        <p:spPr>
-          <a:xfrm>
-            <a:off x="6562191" y="2130552"/>
-            <a:ext cx="4696815" cy="274320"/>
-          </a:xfrm>
-          <a:prstGeom prst="rect">
-            <a:avLst/>
-          </a:prstGeom>
-          <a:noFill/>
-        </p:spPr>
-        <p:txBody>
-          <a:bodyPr wrap="square" lIns="0" rIns="0" tIns="0" bIns="0" anchor="t">
-            <a:spAutoFit/>
-          </a:bodyPr>
-          <a:lstStyle/>
-          <a:p>
-            <a:pPr algn="l">
-              <a:lnSpc>
-                <a:spcPct val="135000"/>
-              </a:lnSpc>
-            </a:pPr>
-            <a:r>
-              <a:rPr sz="1300" b="1" i="0" spc="156">
-                <a:solidFill>
-                  <a:srgbClr val="07734A"/>
-                </a:solidFill>
-                <a:latin typeface="Verdana"/>
-              </a:rPr>
-              <a:t>IL FAUT DIRE PLUTÔT</a:t>
-            </a:r>
-          </a:p>
-        </p:txBody>
-      </p:sp>
-      <p:sp>
-        <p:nvSpPr>
-          <p:cNvPr id="12" name="TextBox 11"/>
-          <p:cNvSpPr txBox="1"/>
-          <p:nvPr/>
-        </p:nvSpPr>
-        <p:spPr>
-          <a:xfrm>
-            <a:off x="6562191" y="2569464"/>
-            <a:ext cx="4696815" cy="1417320"/>
-          </a:xfrm>
-          <a:prstGeom prst="rect">
-            <a:avLst/>
-          </a:prstGeom>
-          <a:noFill/>
-        </p:spPr>
-        <p:txBody>
-          <a:bodyPr wrap="square" lIns="0" rIns="0" tIns="0" bIns="0" anchor="t">
-            <a:spAutoFit/>
-          </a:bodyPr>
-          <a:lstStyle/>
-          <a:p>
-            <a:pPr algn="l">
-              <a:lnSpc>
-                <a:spcPct val="130000"/>
-              </a:lnSpc>
-            </a:pPr>
-            <a:r>
-              <a:rPr sz="2500" b="1" i="0">
-                <a:solidFill>
-                  <a:srgbClr val="17181A"/>
-                </a:solidFill>
-                <a:latin typeface="Verdana"/>
-              </a:rPr>
-              <a:t>Un enseignant de francisation.</a:t>
-            </a:r>
-          </a:p>
-        </p:txBody>
-      </p:sp>
-      <p:sp>
-        <p:nvSpPr>
-          <p:cNvPr id="13" name="Rounded Rectangle 12"/>
-          <p:cNvSpPr/>
-          <p:nvPr/>
-        </p:nvSpPr>
-        <p:spPr>
-          <a:xfrm>
-            <a:off x="566928" y="4462272"/>
-            <a:ext cx="11057839" cy="1285240"/>
-          </a:xfrm>
-          <a:prstGeom prst="roundRect">
-            <a:avLst>
-              <a:gd name="adj" fmla="val 11383"/>
-            </a:avLst>
-          </a:prstGeom>
-          <a:solidFill>
-            <a:srgbClr val="FFFFFF"/>
-          </a:solidFill>
-          <a:ln w="12700">
-            <a:solidFill>
-              <a:srgbClr val="EAEAE8"/>
-            </a:solidFill>
-          </a:ln>
-          <a:effectLst/>
-        </p:spPr>
-        <p:style>
-          <a:lnRef idx="1">
-            <a:schemeClr val="accent1"/>
-          </a:lnRef>
-          <a:fillRef idx="3">
-            <a:schemeClr val="accent1"/>
-          </a:fillRef>
-          <a:effectRef idx="2">
-            <a:schemeClr val="accent1"/>
-          </a:effectRef>
-          <a:fontRef idx="minor">
-            <a:schemeClr val="lt1"/>
-          </a:fontRef>
-        </p:style>
-        <p:txBody>
-          <a:bodyPr rtlCol="0" anchor="ctr"/>
-          <a:lstStyle/>
-          <a:p/>
-        </p:txBody>
-      </p:sp>
-      <p:sp>
-        <p:nvSpPr>
-          <p:cNvPr id="14" name="TextBox 13"/>
-          <p:cNvSpPr txBox="1"/>
-          <p:nvPr/>
-        </p:nvSpPr>
-        <p:spPr>
-          <a:xfrm>
-            <a:off x="969264" y="4736592"/>
-            <a:ext cx="10234879" cy="782320"/>
-          </a:xfrm>
-          <a:prstGeom prst="rect">
-            <a:avLst/>
-          </a:prstGeom>
-          <a:noFill/>
-        </p:spPr>
-        <p:txBody>
-          <a:bodyPr wrap="square" lIns="0" rIns="0" tIns="0" bIns="0" anchor="t">
-            <a:spAutoFit/>
-          </a:bodyPr>
-          <a:lstStyle/>
-          <a:p>
-            <a:pPr algn="l">
-              <a:lnSpc>
-                <a:spcPct val="145000"/>
-              </a:lnSpc>
-            </a:pPr>
-            <a:r>
-              <a:rPr sz="2000" b="0" i="0">
-                <a:solidFill>
-                  <a:srgbClr val="4B4F52"/>
-                </a:solidFill>
-                <a:latin typeface="Verdana"/>
-              </a:rPr>
-              <a:t>Le contenu est écrit à partir du programme du Ministère, situation par situation — jamais recopié d'un manuel existant.</a:t>
-            </a:r>
-          </a:p>
-        </p:txBody>
-      </p:sp>
+      <p:pic>
+        <p:nvPicPr>
+          <p:cNvPr id="9" name="Picture 8" descr="cas-05-feuille-seance.png"/>
+          <p:cNvPicPr>
+            <a:picLocks noChangeAspect="1"/>
+          </p:cNvPicPr>
+          <p:nvPr/>
+        </p:nvPicPr>
+        <p:blipFill>
+          <a:blip r:embed="rId2"/>
+          <a:stretch>
+            <a:fillRect/>
+          </a:stretch>
+        </p:blipFill>
+        <p:spPr>
+          <a:xfrm>
+            <a:off x="4497157" y="2082545"/>
+            <a:ext cx="3197379" cy="4071366"/>
+          </a:xfrm>
+          <a:prstGeom prst="rect">
+            <a:avLst/>
+          </a:prstGeom>
+        </p:spPr>
+      </p:pic>
     </p:spTree>
   </p:cSld>
   <p:clrMapOvr>
@@ -8872,7 +10456,7 @@
                 </a:solidFill>
                 <a:latin typeface="Verdana"/>
               </a:rPr>
-              <a:t>« Nos élèves n'ont pas d'ordinateur. »</a:t>
+              <a:t>« Combien ça coûte ? »</a:t>
             </a:r>
           </a:p>
         </p:txBody>
@@ -8996,7 +10580,7 @@
                 </a:solidFill>
                 <a:latin typeface="Verdana"/>
               </a:rPr>
-              <a:t>Le cours entier se fait sur un téléphone.</a:t>
+              <a:t>Ce qu'on mesure, pas ce qu'on estime.</a:t>
             </a:r>
           </a:p>
         </p:txBody>
@@ -9081,7 +10665,7 @@
                 </a:solidFill>
                 <a:latin typeface="Verdana"/>
               </a:rPr>
-              <a:t>Les sept familles d'exercices, l'enregistrement de la voix, le dépôt d'un texte. Et la fiche papier existe pour ceux qui n'ont rien.</a:t>
+              <a:t>Chaque appel à un modèle est inscrit dans un registre, avec ses jetons. Un centre qui ferme l'assistant ne paie plus rien à l'usage.</a:t>
             </a:r>
           </a:p>
         </p:txBody>
